--- a/tema2/diapositivas/usuarios-persistidos-bcrypt.pptx
+++ b/tema2/diapositivas/usuarios-persistidos-bcrypt.pptx
@@ -4,6 +4,9 @@
   <p:sldMasterIdLst>
     <p:sldMasterId id="2147483648" r:id="rId1"/>
   </p:sldMasterIdLst>
+  <p:notesMasterIdLst>
+    <p:notesMasterId r:id="rId30"/>
+  </p:notesMasterIdLst>
   <p:sldIdLst>
     <p:sldId id="256" r:id="rId2"/>
     <p:sldId id="257" r:id="rId3"/>
@@ -34,9 +37,6 @@
     <p:sldId id="282" r:id="rId28"/>
     <p:sldId id="283" r:id="rId29"/>
   </p:sldIdLst>
-  <p:notesMasterIdLst>
-    <p:notesMasterId r:id="rId30"/>
-  </p:notesMasterIdLst>
   <p:sldSz cx="12192000" cy="6858000"/>
   <p:notesSz cx="6858000" cy="12192000"/>
   <p:defaultTextStyle>
@@ -131,6 +131,11 @@
       </a:defRPr>
     </a:lvl9pPr>
   </p:defaultTextStyle>
+  <p:extLst>
+    <p:ext uri="{EFAFB233-063F-42B5-8137-9DF3F51BA10A}">
+      <p15:sldGuideLst xmlns:p15="http://schemas.microsoft.com/office/powerpoint/2012/main"/>
+    </p:ext>
+  </p:extLst>
 </p:presentation>
 </file>
 
@@ -156,234 +161,10 @@
           <a:chExt cx="0" cy="0"/>
         </a:xfrm>
       </p:grpSpPr>
-      <p:sp>
-        <p:nvSpPr>
-          <p:cNvPr id="2" name="Header Placeholder 1"/>
-          <p:cNvSpPr>
-            <a:spLocks noGrp="1"/>
-          </p:cNvSpPr>
-          <p:nvPr>
-            <p:ph type="hdr" sz="quarter"/>
-          </p:nvPr>
-        </p:nvSpPr>
-        <p:spPr>
-          <a:xfrm>
-            <a:off x="0" y="0"/>
-            <a:ext cx="2971800" cy="458788"/>
-          </a:xfrm>
-          <a:prstGeom prst="rect">
-            <a:avLst/>
-          </a:prstGeom>
-        </p:spPr>
-        <p:txBody>
-          <a:bodyPr vert="horz" lIns="91440" tIns="45720" rIns="91440" bIns="45720" rtlCol="0"/>
-          <a:lstStyle>
-            <a:lvl1pPr algn="l">
-              <a:defRPr sz="1200"/>
-            </a:lvl1pPr>
-          </a:lstStyle>
-          <a:p>
-            <a:endParaRPr lang="en-US"/>
-          </a:p>
-        </p:txBody>
-      </p:sp>
-      <p:sp>
-        <p:nvSpPr>
-          <p:cNvPr id="3" name="Date Placeholder 2"/>
-          <p:cNvSpPr>
-            <a:spLocks noGrp="1"/>
-          </p:cNvSpPr>
-          <p:nvPr>
-            <p:ph type="dt" idx="1"/>
-          </p:nvPr>
-        </p:nvSpPr>
-        <p:spPr>
-          <a:xfrm>
-            <a:off x="3884613" y="0"/>
-            <a:ext cx="2971800" cy="458788"/>
-          </a:xfrm>
-          <a:prstGeom prst="rect">
-            <a:avLst/>
-          </a:prstGeom>
-        </p:spPr>
-        <p:txBody>
-          <a:bodyPr vert="horz" lIns="91440" tIns="45720" rIns="91440" bIns="45720" rtlCol="0"/>
-          <a:lstStyle>
-            <a:lvl1pPr algn="r">
-              <a:defRPr sz="1200"/>
-            </a:lvl1pPr>
-          </a:lstStyle>
-          <a:p>
-            <a:fld id="{5282F153-3F37-0F45-9E97-73ACFA13230C}" type="datetimeFigureOut">
-              <a:rPr lang="en-US"/>
-              <a:t>7/23/19</a:t>
-            </a:fld>
-            <a:endParaRPr lang="en-US"/>
-          </a:p>
-        </p:txBody>
-      </p:sp>
-      <p:sp>
-        <p:nvSpPr>
-          <p:cNvPr id="4" name="Slide Image Placeholder 3"/>
-          <p:cNvSpPr>
-            <a:spLocks noGrp="1" noRot="1" noChangeAspect="1"/>
-          </p:cNvSpPr>
-          <p:nvPr>
-            <p:ph type="sldImg" idx="2"/>
-          </p:nvPr>
-        </p:nvSpPr>
-        <p:spPr>
-          <a:xfrm>
-            <a:off x="685800" y="1143000"/>
-            <a:ext cx="5486400" cy="3086100"/>
-          </a:xfrm>
-          <a:prstGeom prst="rect">
-            <a:avLst/>
-          </a:prstGeom>
-          <a:noFill/>
-          <a:ln w="12700">
-            <a:solidFill>
-              <a:prstClr val="black"/>
-            </a:solidFill>
-          </a:ln>
-        </p:spPr>
-        <p:txBody>
-          <a:bodyPr vert="horz" lIns="91440" tIns="45720" rIns="91440" bIns="45720" rtlCol="0" anchor="ctr"/>
-          <a:lstStyle/>
-          <a:p>
-            <a:endParaRPr lang="en-US"/>
-          </a:p>
-        </p:txBody>
-      </p:sp>
-      <p:sp>
-        <p:nvSpPr>
-          <p:cNvPr id="5" name="Notes Placeholder 4"/>
-          <p:cNvSpPr>
-            <a:spLocks noGrp="1"/>
-          </p:cNvSpPr>
-          <p:nvPr>
-            <p:ph type="body" sz="quarter" idx="3"/>
-          </p:nvPr>
-        </p:nvSpPr>
-        <p:spPr>
-          <a:xfrm>
-            <a:off x="685800" y="4400550"/>
-            <a:ext cx="5486400" cy="3600450"/>
-          </a:xfrm>
-          <a:prstGeom prst="rect">
-            <a:avLst/>
-          </a:prstGeom>
-        </p:spPr>
-        <p:txBody>
-          <a:bodyPr vert="horz" lIns="91440" tIns="45720" rIns="91440" bIns="45720" rtlCol="0"/>
-          <a:lstStyle/>
-          <a:p>
-            <a:pPr lvl="0"/>
-            <a:r>
-              <a:rPr lang="en-US"/>
-              <a:t>Click to edit Master text styles</a:t>
-            </a:r>
-          </a:p>
-          <a:p>
-            <a:pPr lvl="1"/>
-            <a:r>
-              <a:rPr lang="en-US"/>
-              <a:t>Second level</a:t>
-            </a:r>
-          </a:p>
-          <a:p>
-            <a:pPr lvl="2"/>
-            <a:r>
-              <a:rPr lang="en-US"/>
-              <a:t>Third level</a:t>
-            </a:r>
-          </a:p>
-          <a:p>
-            <a:pPr lvl="3"/>
-            <a:r>
-              <a:rPr lang="en-US"/>
-              <a:t>Fourth level</a:t>
-            </a:r>
-          </a:p>
-          <a:p>
-            <a:pPr lvl="4"/>
-            <a:r>
-              <a:rPr lang="en-US"/>
-              <a:t>Fifth level</a:t>
-            </a:r>
-          </a:p>
-        </p:txBody>
-      </p:sp>
-      <p:sp>
-        <p:nvSpPr>
-          <p:cNvPr id="6" name="Footer Placeholder 5"/>
-          <p:cNvSpPr>
-            <a:spLocks noGrp="1"/>
-          </p:cNvSpPr>
-          <p:nvPr>
-            <p:ph type="ftr" sz="quarter" idx="4"/>
-          </p:nvPr>
-        </p:nvSpPr>
-        <p:spPr>
-          <a:xfrm>
-            <a:off x="0" y="8685213"/>
-            <a:ext cx="2971800" cy="458787"/>
-          </a:xfrm>
-          <a:prstGeom prst="rect">
-            <a:avLst/>
-          </a:prstGeom>
-        </p:spPr>
-        <p:txBody>
-          <a:bodyPr vert="horz" lIns="91440" tIns="45720" rIns="91440" bIns="45720" rtlCol="0" anchor="b"/>
-          <a:lstStyle>
-            <a:lvl1pPr algn="l">
-              <a:defRPr sz="1200"/>
-            </a:lvl1pPr>
-          </a:lstStyle>
-          <a:p>
-            <a:endParaRPr lang="en-US"/>
-          </a:p>
-        </p:txBody>
-      </p:sp>
-      <p:sp>
-        <p:nvSpPr>
-          <p:cNvPr id="7" name="Slide Number Placeholder 6"/>
-          <p:cNvSpPr>
-            <a:spLocks noGrp="1"/>
-          </p:cNvSpPr>
-          <p:nvPr>
-            <p:ph type="sldNum" sz="quarter" idx="5"/>
-          </p:nvPr>
-        </p:nvSpPr>
-        <p:spPr>
-          <a:xfrm>
-            <a:off x="3884613" y="8685213"/>
-            <a:ext cx="2971800" cy="458787"/>
-          </a:xfrm>
-          <a:prstGeom prst="rect">
-            <a:avLst/>
-          </a:prstGeom>
-        </p:spPr>
-        <p:txBody>
-          <a:bodyPr vert="horz" lIns="91440" tIns="45720" rIns="91440" bIns="45720" rtlCol="0" anchor="b"/>
-          <a:lstStyle>
-            <a:lvl1pPr algn="r">
-              <a:defRPr sz="1200"/>
-            </a:lvl1pPr>
-          </a:lstStyle>
-          <a:p>
-            <a:fld id="{CE5E9CC1-C706-0F49-92D6-E571CC5EEA8F}" type="slidenum">
-              <a:rPr lang="en-US"/>
-              <a:t>‹#›</a:t>
-            </a:fld>
-            <a:endParaRPr lang="en-US"/>
-          </a:p>
-        </p:txBody>
-      </p:sp>
     </p:spTree>
     <p:extLst>
       <p:ext uri="{BB962C8B-B14F-4D97-AF65-F5344CB8AC3E}">
-        <p14:creationId xmlns:p14="http://schemas.microsoft.com/office/powerpoint/2010/main" val="1024086991"/>
+        <p14:creationId xmlns:p14="http://schemas.microsoft.com/office/powerpoint/2010/main" val="3538274072"/>
       </p:ext>
     </p:extLst>
   </p:cSld>
@@ -527,10 +308,6 @@
           <a:bodyPr/>
           <a:lstStyle/>
           <a:p>
-            <a:r>
-              <a:rPr lang="en-US" dirty="0"/>
-              <a:t/>
-            </a:r>
             <a:endParaRPr lang="en-US" dirty="0"/>
           </a:p>
         </p:txBody>
@@ -615,10 +392,6 @@
           <a:bodyPr/>
           <a:lstStyle/>
           <a:p>
-            <a:r>
-              <a:rPr lang="en-US" dirty="0"/>
-              <a:t/>
-            </a:r>
             <a:endParaRPr lang="en-US" dirty="0"/>
           </a:p>
         </p:txBody>
@@ -703,10 +476,6 @@
           <a:bodyPr/>
           <a:lstStyle/>
           <a:p>
-            <a:r>
-              <a:rPr lang="en-US" dirty="0"/>
-              <a:t/>
-            </a:r>
             <a:endParaRPr lang="en-US" dirty="0"/>
           </a:p>
         </p:txBody>
@@ -791,10 +560,6 @@
           <a:bodyPr/>
           <a:lstStyle/>
           <a:p>
-            <a:r>
-              <a:rPr lang="en-US" dirty="0"/>
-              <a:t/>
-            </a:r>
             <a:endParaRPr lang="en-US" dirty="0"/>
           </a:p>
         </p:txBody>
@@ -879,10 +644,6 @@
           <a:bodyPr/>
           <a:lstStyle/>
           <a:p>
-            <a:r>
-              <a:rPr lang="en-US" dirty="0"/>
-              <a:t/>
-            </a:r>
             <a:endParaRPr lang="en-US" dirty="0"/>
           </a:p>
         </p:txBody>
@@ -967,10 +728,6 @@
           <a:bodyPr/>
           <a:lstStyle/>
           <a:p>
-            <a:r>
-              <a:rPr lang="en-US" dirty="0"/>
-              <a:t/>
-            </a:r>
             <a:endParaRPr lang="en-US" dirty="0"/>
           </a:p>
         </p:txBody>
@@ -1055,10 +812,6 @@
           <a:bodyPr/>
           <a:lstStyle/>
           <a:p>
-            <a:r>
-              <a:rPr lang="en-US" dirty="0"/>
-              <a:t/>
-            </a:r>
             <a:endParaRPr lang="en-US" dirty="0"/>
           </a:p>
         </p:txBody>
@@ -1143,10 +896,6 @@
           <a:bodyPr/>
           <a:lstStyle/>
           <a:p>
-            <a:r>
-              <a:rPr lang="en-US" dirty="0"/>
-              <a:t/>
-            </a:r>
             <a:endParaRPr lang="en-US" dirty="0"/>
           </a:p>
         </p:txBody>
@@ -1231,10 +980,6 @@
           <a:bodyPr/>
           <a:lstStyle/>
           <a:p>
-            <a:r>
-              <a:rPr lang="en-US" dirty="0"/>
-              <a:t/>
-            </a:r>
             <a:endParaRPr lang="en-US" dirty="0"/>
           </a:p>
         </p:txBody>
@@ -1319,10 +1064,6 @@
           <a:bodyPr/>
           <a:lstStyle/>
           <a:p>
-            <a:r>
-              <a:rPr lang="en-US" dirty="0"/>
-              <a:t/>
-            </a:r>
             <a:endParaRPr lang="en-US" dirty="0"/>
           </a:p>
         </p:txBody>
@@ -1407,10 +1148,6 @@
           <a:bodyPr/>
           <a:lstStyle/>
           <a:p>
-            <a:r>
-              <a:rPr lang="en-US" dirty="0"/>
-              <a:t/>
-            </a:r>
             <a:endParaRPr lang="en-US" dirty="0"/>
           </a:p>
         </p:txBody>
@@ -1495,10 +1232,6 @@
           <a:bodyPr/>
           <a:lstStyle/>
           <a:p>
-            <a:r>
-              <a:rPr lang="en-US" dirty="0"/>
-              <a:t/>
-            </a:r>
             <a:endParaRPr lang="en-US" dirty="0"/>
           </a:p>
         </p:txBody>
@@ -1583,10 +1316,6 @@
           <a:bodyPr/>
           <a:lstStyle/>
           <a:p>
-            <a:r>
-              <a:rPr lang="en-US" dirty="0"/>
-              <a:t/>
-            </a:r>
             <a:endParaRPr lang="en-US" dirty="0"/>
           </a:p>
         </p:txBody>
@@ -1671,10 +1400,6 @@
           <a:bodyPr/>
           <a:lstStyle/>
           <a:p>
-            <a:r>
-              <a:rPr lang="en-US" dirty="0"/>
-              <a:t/>
-            </a:r>
             <a:endParaRPr lang="en-US" dirty="0"/>
           </a:p>
         </p:txBody>
@@ -1759,10 +1484,6 @@
           <a:bodyPr/>
           <a:lstStyle/>
           <a:p>
-            <a:r>
-              <a:rPr lang="en-US" dirty="0"/>
-              <a:t/>
-            </a:r>
             <a:endParaRPr lang="en-US" dirty="0"/>
           </a:p>
         </p:txBody>
@@ -1847,10 +1568,6 @@
           <a:bodyPr/>
           <a:lstStyle/>
           <a:p>
-            <a:r>
-              <a:rPr lang="en-US" dirty="0"/>
-              <a:t/>
-            </a:r>
             <a:endParaRPr lang="en-US" dirty="0"/>
           </a:p>
         </p:txBody>
@@ -1935,10 +1652,6 @@
           <a:bodyPr/>
           <a:lstStyle/>
           <a:p>
-            <a:r>
-              <a:rPr lang="en-US" dirty="0"/>
-              <a:t/>
-            </a:r>
             <a:endParaRPr lang="en-US" dirty="0"/>
           </a:p>
         </p:txBody>
@@ -2023,10 +1736,6 @@
           <a:bodyPr/>
           <a:lstStyle/>
           <a:p>
-            <a:r>
-              <a:rPr lang="en-US" dirty="0"/>
-              <a:t/>
-            </a:r>
             <a:endParaRPr lang="en-US" dirty="0"/>
           </a:p>
         </p:txBody>
@@ -2111,10 +1820,6 @@
           <a:bodyPr/>
           <a:lstStyle/>
           <a:p>
-            <a:r>
-              <a:rPr lang="en-US" dirty="0"/>
-              <a:t/>
-            </a:r>
             <a:endParaRPr lang="en-US" dirty="0"/>
           </a:p>
         </p:txBody>
@@ -2199,10 +1904,6 @@
           <a:bodyPr/>
           <a:lstStyle/>
           <a:p>
-            <a:r>
-              <a:rPr lang="en-US" dirty="0"/>
-              <a:t/>
-            </a:r>
             <a:endParaRPr lang="en-US" dirty="0"/>
           </a:p>
         </p:txBody>
@@ -2287,10 +1988,6 @@
           <a:bodyPr/>
           <a:lstStyle/>
           <a:p>
-            <a:r>
-              <a:rPr lang="en-US" dirty="0"/>
-              <a:t/>
-            </a:r>
             <a:endParaRPr lang="en-US" dirty="0"/>
           </a:p>
         </p:txBody>
@@ -2375,10 +2072,6 @@
           <a:bodyPr/>
           <a:lstStyle/>
           <a:p>
-            <a:r>
-              <a:rPr lang="en-US" dirty="0"/>
-              <a:t/>
-            </a:r>
             <a:endParaRPr lang="en-US" dirty="0"/>
           </a:p>
         </p:txBody>
@@ -2463,10 +2156,6 @@
           <a:bodyPr/>
           <a:lstStyle/>
           <a:p>
-            <a:r>
-              <a:rPr lang="en-US" dirty="0"/>
-              <a:t/>
-            </a:r>
             <a:endParaRPr lang="en-US" dirty="0"/>
           </a:p>
         </p:txBody>
@@ -2551,10 +2240,6 @@
           <a:bodyPr/>
           <a:lstStyle/>
           <a:p>
-            <a:r>
-              <a:rPr lang="en-US" dirty="0"/>
-              <a:t/>
-            </a:r>
             <a:endParaRPr lang="en-US" dirty="0"/>
           </a:p>
         </p:txBody>
@@ -2639,10 +2324,6 @@
           <a:bodyPr/>
           <a:lstStyle/>
           <a:p>
-            <a:r>
-              <a:rPr lang="en-US" dirty="0"/>
-              <a:t/>
-            </a:r>
             <a:endParaRPr lang="en-US" dirty="0"/>
           </a:p>
         </p:txBody>
@@ -2727,10 +2408,6 @@
           <a:bodyPr/>
           <a:lstStyle/>
           <a:p>
-            <a:r>
-              <a:rPr lang="en-US" dirty="0"/>
-              <a:t/>
-            </a:r>
             <a:endParaRPr lang="en-US" dirty="0"/>
           </a:p>
         </p:txBody>
@@ -2815,10 +2492,6 @@
           <a:bodyPr/>
           <a:lstStyle/>
           <a:p>
-            <a:r>
-              <a:rPr lang="en-US" dirty="0"/>
-              <a:t/>
-            </a:r>
             <a:endParaRPr lang="en-US" dirty="0"/>
           </a:p>
         </p:txBody>
@@ -2903,10 +2576,6 @@
           <a:bodyPr/>
           <a:lstStyle/>
           <a:p>
-            <a:r>
-              <a:rPr lang="en-US" dirty="0"/>
-              <a:t/>
-            </a:r>
             <a:endParaRPr lang="en-US" dirty="0"/>
           </a:p>
         </p:txBody>
@@ -2980,6 +2649,11 @@
 <file path=ppt/slideMasters/slideMaster1.xml><?xml version="1.0" encoding="utf-8"?>
 <p:sldMaster xmlns:a="http://schemas.openxmlformats.org/drawingml/2006/main" xmlns:r="http://schemas.openxmlformats.org/officeDocument/2006/relationships" xmlns:p="http://schemas.openxmlformats.org/presentationml/2006/main">
   <p:cSld>
+    <p:bg>
+      <p:bgRef idx="1001">
+        <a:schemeClr val="bg1"/>
+      </p:bgRef>
+    </p:bg>
     <p:spTree>
       <p:nvGrpSpPr>
         <p:cNvPr id="1" name=""/>
@@ -3262,6 +2936,7 @@
         <a:solidFill>
           <a:srgbClr val="4E342E"/>
         </a:solidFill>
+        <a:effectLst/>
       </p:bgPr>
     </p:bg>
     <p:spTree>
@@ -3299,7 +2974,7 @@
           <a:bodyPr wrap="square" rtlCol="0" anchor="ctr"/>
           <a:lstStyle/>
           <a:p>
-            <a:pPr indent="0" marL="0">
+            <a:pPr marL="0" indent="0">
               <a:buNone/>
             </a:pPr>
             <a:r>
@@ -3338,7 +3013,7 @@
           <a:bodyPr wrap="square" rtlCol="0" anchor="ctr"/>
           <a:lstStyle/>
           <a:p>
-            <a:pPr algn="l" indent="0" marL="0">
+            <a:pPr marL="0" indent="0" algn="l">
               <a:buNone/>
             </a:pPr>
             <a:r>
@@ -3355,7 +3030,7 @@
             <a:endParaRPr lang="en-US" sz="3800" dirty="0"/>
           </a:p>
           <a:p>
-            <a:pPr algn="l" indent="0" marL="0">
+            <a:pPr marL="0" indent="0" algn="l">
               <a:buNone/>
             </a:pPr>
             <a:r>
@@ -3397,6 +3072,13 @@
             <a:prstDash val="solid"/>
           </a:ln>
         </p:spPr>
+        <p:txBody>
+          <a:bodyPr/>
+          <a:lstStyle/>
+          <a:p>
+            <a:endParaRPr lang="es-ES"/>
+          </a:p>
+        </p:txBody>
       </p:sp>
       <p:sp>
         <p:nvSpPr>
@@ -3419,7 +3101,7 @@
           <a:bodyPr wrap="square" rtlCol="0" anchor="ctr"/>
           <a:lstStyle/>
           <a:p>
-            <a:pPr indent="0" marL="0">
+            <a:pPr marL="0" indent="0">
               <a:buNone/>
             </a:pPr>
             <a:r>
@@ -3486,6 +3168,13 @@
             <a:prstDash val="solid"/>
           </a:ln>
         </p:spPr>
+        <p:txBody>
+          <a:bodyPr/>
+          <a:lstStyle/>
+          <a:p>
+            <a:endParaRPr lang="es-ES"/>
+          </a:p>
+        </p:txBody>
       </p:sp>
       <p:sp>
         <p:nvSpPr>
@@ -3508,7 +3197,7 @@
           <a:bodyPr wrap="square" rtlCol="0" anchor="ctr"/>
           <a:lstStyle/>
           <a:p>
-            <a:pPr indent="0" marL="0">
+            <a:pPr marL="0" indent="0">
               <a:buNone/>
             </a:pPr>
             <a:r>
@@ -3547,7 +3236,7 @@
           <a:bodyPr wrap="square" rtlCol="0" anchor="ctr"/>
           <a:lstStyle/>
           <a:p>
-            <a:pPr algn="r" indent="0" marL="0">
+            <a:pPr marL="0" indent="0" algn="r">
               <a:buNone/>
             </a:pPr>
             <a:r>
@@ -3586,7 +3275,7 @@
           <a:bodyPr wrap="square" rtlCol="0" anchor="t"/>
           <a:lstStyle/>
           <a:p>
-            <a:pPr indent="0" marL="0">
+            <a:pPr marL="0" indent="0">
               <a:buNone/>
             </a:pPr>
             <a:r>
@@ -3628,6 +3317,13 @@
             <a:prstDash val="solid"/>
           </a:ln>
         </p:spPr>
+        <p:txBody>
+          <a:bodyPr/>
+          <a:lstStyle/>
+          <a:p>
+            <a:endParaRPr lang="es-ES"/>
+          </a:p>
+        </p:txBody>
       </p:sp>
       <p:sp>
         <p:nvSpPr>
@@ -3653,6 +3349,13 @@
             <a:prstDash val="solid"/>
           </a:ln>
         </p:spPr>
+        <p:txBody>
+          <a:bodyPr/>
+          <a:lstStyle/>
+          <a:p>
+            <a:endParaRPr lang="es-ES"/>
+          </a:p>
+        </p:txBody>
       </p:sp>
       <p:sp>
         <p:nvSpPr>
@@ -3675,7 +3378,7 @@
           <a:bodyPr wrap="square" rtlCol="0" anchor="t"/>
           <a:lstStyle/>
           <a:p>
-            <a:pPr indent="0" marL="0">
+            <a:pPr marL="0" indent="0">
               <a:buNone/>
             </a:pPr>
             <a:r>
@@ -3692,7 +3395,7 @@
             <a:endParaRPr lang="en-US" sz="1600" dirty="0"/>
           </a:p>
           <a:p>
-            <a:pPr indent="0" marL="0">
+            <a:pPr marL="0" indent="0">
               <a:buNone/>
             </a:pPr>
             <a:r>
@@ -3709,7 +3412,7 @@
             <a:endParaRPr lang="en-US" sz="1600" dirty="0"/>
           </a:p>
           <a:p>
-            <a:pPr indent="0" marL="0">
+            <a:pPr marL="0" indent="0">
               <a:buNone/>
             </a:pPr>
             <a:r>
@@ -3726,7 +3429,7 @@
             <a:endParaRPr lang="en-US" sz="1600" dirty="0"/>
           </a:p>
           <a:p>
-            <a:pPr indent="0" marL="0">
+            <a:pPr marL="0" indent="0">
               <a:buNone/>
             </a:pPr>
             <a:r>
@@ -3765,7 +3468,7 @@
           <a:bodyPr wrap="square" rtlCol="0" anchor="t"/>
           <a:lstStyle/>
           <a:p>
-            <a:pPr indent="0" marL="0">
+            <a:pPr marL="0" indent="0">
               <a:buNone/>
             </a:pPr>
             <a:r>
@@ -3832,6 +3535,13 @@
             <a:prstDash val="solid"/>
           </a:ln>
         </p:spPr>
+        <p:txBody>
+          <a:bodyPr/>
+          <a:lstStyle/>
+          <a:p>
+            <a:endParaRPr lang="es-ES"/>
+          </a:p>
+        </p:txBody>
       </p:sp>
       <p:sp>
         <p:nvSpPr>
@@ -3854,7 +3564,7 @@
           <a:bodyPr wrap="square" rtlCol="0" anchor="ctr"/>
           <a:lstStyle/>
           <a:p>
-            <a:pPr indent="0" marL="0">
+            <a:pPr marL="0" indent="0">
               <a:buNone/>
             </a:pPr>
             <a:r>
@@ -3893,7 +3603,7 @@
           <a:bodyPr wrap="square" rtlCol="0" anchor="ctr"/>
           <a:lstStyle/>
           <a:p>
-            <a:pPr algn="r" indent="0" marL="0">
+            <a:pPr marL="0" indent="0" algn="r">
               <a:buNone/>
             </a:pPr>
             <a:r>
@@ -3935,6 +3645,13 @@
             <a:prstDash val="solid"/>
           </a:ln>
         </p:spPr>
+        <p:txBody>
+          <a:bodyPr/>
+          <a:lstStyle/>
+          <a:p>
+            <a:endParaRPr lang="es-ES"/>
+          </a:p>
+        </p:txBody>
       </p:sp>
       <p:sp>
         <p:nvSpPr>
@@ -3960,6 +3677,13 @@
             <a:prstDash val="solid"/>
           </a:ln>
         </p:spPr>
+        <p:txBody>
+          <a:bodyPr/>
+          <a:lstStyle/>
+          <a:p>
+            <a:endParaRPr lang="es-ES"/>
+          </a:p>
+        </p:txBody>
       </p:sp>
       <p:sp>
         <p:nvSpPr>
@@ -3982,7 +3706,7 @@
           <a:bodyPr wrap="square" rtlCol="0" anchor="t"/>
           <a:lstStyle/>
           <a:p>
-            <a:pPr indent="0" marL="0">
+            <a:pPr marL="0" indent="0">
               <a:buNone/>
             </a:pPr>
             <a:r>
@@ -3999,7 +3723,7 @@
             <a:endParaRPr lang="en-US" sz="1800" dirty="0"/>
           </a:p>
           <a:p>
-            <a:pPr indent="0" marL="0">
+            <a:pPr marL="0" indent="0">
               <a:buNone/>
             </a:pPr>
             <a:r>
@@ -4016,7 +3740,7 @@
             <a:endParaRPr lang="en-US" sz="1800" dirty="0"/>
           </a:p>
           <a:p>
-            <a:pPr indent="0" marL="0">
+            <a:pPr marL="0" indent="0">
               <a:buNone/>
             </a:pPr>
             <a:r>
@@ -4033,7 +3757,7 @@
             <a:endParaRPr lang="en-US" sz="1800" dirty="0"/>
           </a:p>
           <a:p>
-            <a:pPr indent="0" marL="0">
+            <a:pPr marL="0" indent="0">
               <a:buNone/>
             </a:pPr>
             <a:r>
@@ -4075,6 +3799,13 @@
             <a:prstDash val="solid"/>
           </a:ln>
         </p:spPr>
+        <p:txBody>
+          <a:bodyPr/>
+          <a:lstStyle/>
+          <a:p>
+            <a:endParaRPr lang="es-ES"/>
+          </a:p>
+        </p:txBody>
       </p:sp>
       <p:sp>
         <p:nvSpPr>
@@ -4097,7 +3828,7 @@
           <a:bodyPr wrap="square" rtlCol="0" anchor="ctr"/>
           <a:lstStyle/>
           <a:p>
-            <a:pPr indent="0" marL="0">
+            <a:pPr marL="0" indent="0">
               <a:buNone/>
             </a:pPr>
             <a:r>
@@ -4164,6 +3895,13 @@
             <a:prstDash val="solid"/>
           </a:ln>
         </p:spPr>
+        <p:txBody>
+          <a:bodyPr/>
+          <a:lstStyle/>
+          <a:p>
+            <a:endParaRPr lang="es-ES"/>
+          </a:p>
+        </p:txBody>
       </p:sp>
       <p:sp>
         <p:nvSpPr>
@@ -4186,7 +3924,7 @@
           <a:bodyPr wrap="square" rtlCol="0" anchor="ctr"/>
           <a:lstStyle/>
           <a:p>
-            <a:pPr indent="0" marL="0">
+            <a:pPr marL="0" indent="0">
               <a:buNone/>
             </a:pPr>
             <a:r>
@@ -4225,7 +3963,7 @@
           <a:bodyPr wrap="square" rtlCol="0" anchor="ctr"/>
           <a:lstStyle/>
           <a:p>
-            <a:pPr algn="r" indent="0" marL="0">
+            <a:pPr marL="0" indent="0" algn="r">
               <a:buNone/>
             </a:pPr>
             <a:r>
@@ -4267,6 +4005,13 @@
             <a:prstDash val="solid"/>
           </a:ln>
         </p:spPr>
+        <p:txBody>
+          <a:bodyPr/>
+          <a:lstStyle/>
+          <a:p>
+            <a:endParaRPr lang="es-ES"/>
+          </a:p>
+        </p:txBody>
       </p:sp>
       <p:sp>
         <p:nvSpPr>
@@ -4289,7 +4034,7 @@
           <a:bodyPr wrap="square" rtlCol="0" anchor="ctr"/>
           <a:lstStyle/>
           <a:p>
-            <a:pPr indent="0" marL="0">
+            <a:pPr marL="0" indent="0">
               <a:buNone/>
             </a:pPr>
             <a:r>
@@ -4356,6 +4101,13 @@
             <a:prstDash val="solid"/>
           </a:ln>
         </p:spPr>
+        <p:txBody>
+          <a:bodyPr/>
+          <a:lstStyle/>
+          <a:p>
+            <a:endParaRPr lang="es-ES"/>
+          </a:p>
+        </p:txBody>
       </p:sp>
       <p:sp>
         <p:nvSpPr>
@@ -4378,7 +4130,7 @@
           <a:bodyPr wrap="square" rtlCol="0" anchor="ctr"/>
           <a:lstStyle/>
           <a:p>
-            <a:pPr indent="0" marL="0">
+            <a:pPr marL="0" indent="0">
               <a:buNone/>
             </a:pPr>
             <a:r>
@@ -4417,7 +4169,7 @@
           <a:bodyPr wrap="square" rtlCol="0" anchor="ctr"/>
           <a:lstStyle/>
           <a:p>
-            <a:pPr algn="r" indent="0" marL="0">
+            <a:pPr marL="0" indent="0" algn="r">
               <a:buNone/>
             </a:pPr>
             <a:r>
@@ -4459,6 +4211,13 @@
             <a:prstDash val="solid"/>
           </a:ln>
         </p:spPr>
+        <p:txBody>
+          <a:bodyPr/>
+          <a:lstStyle/>
+          <a:p>
+            <a:endParaRPr lang="es-ES"/>
+          </a:p>
+        </p:txBody>
       </p:sp>
       <p:sp>
         <p:nvSpPr>
@@ -4484,6 +4243,13 @@
             <a:prstDash val="solid"/>
           </a:ln>
         </p:spPr>
+        <p:txBody>
+          <a:bodyPr/>
+          <a:lstStyle/>
+          <a:p>
+            <a:endParaRPr lang="es-ES"/>
+          </a:p>
+        </p:txBody>
       </p:sp>
       <p:sp>
         <p:nvSpPr>
@@ -4506,7 +4272,7 @@
           <a:bodyPr wrap="square" rtlCol="0" anchor="t"/>
           <a:lstStyle/>
           <a:p>
-            <a:pPr indent="0" marL="0">
+            <a:pPr marL="0" indent="0">
               <a:buNone/>
             </a:pPr>
             <a:r>
@@ -4540,15 +4306,27 @@
         </p:nvGraphicFramePr>
         <p:xfrm>
           <a:off x="548640" y="2514600"/>
-          <a:ext cx="11091672" cy="914400"/>
+          <a:ext cx="11091672" cy="2834640"/>
         </p:xfrm>
         <a:graphic>
           <a:graphicData uri="http://schemas.openxmlformats.org/drawingml/2006/table">
             <a:tbl>
               <a:tblPr/>
               <a:tblGrid>
-                <a:gridCol w="2440168"/>
-                <a:gridCol w="8651504"/>
+                <a:gridCol w="2440168">
+                  <a:extLst>
+                    <a:ext uri="{9D8B030D-6E8A-4147-A177-3AD203B41FA5}">
+                      <a16:colId xmlns:a16="http://schemas.microsoft.com/office/drawing/2014/main" val="20000"/>
+                    </a:ext>
+                  </a:extLst>
+                </a:gridCol>
+                <a:gridCol w="8651504">
+                  <a:extLst>
+                    <a:ext uri="{9D8B030D-6E8A-4147-A177-3AD203B41FA5}">
+                      <a16:colId xmlns:a16="http://schemas.microsoft.com/office/drawing/2014/main" val="20001"/>
+                    </a:ext>
+                  </a:extLst>
+                </a:gridCol>
               </a:tblGrid>
               <a:tr h="566928">
                 <a:tc>
@@ -4556,7 +4334,7 @@
                     <a:bodyPr/>
                     <a:lstStyle/>
                     <a:p>
-                      <a:pPr algn="ctr" indent="0" marL="0">
+                      <a:pPr marL="0" indent="0" algn="ctr">
                         <a:buNone/>
                       </a:pPr>
                       <a:r>
@@ -4577,7 +4355,7 @@
                       </a:endParaRPr>
                     </a:p>
                   </a:txBody>
-                  <a:tcPr marL="91440" marR="91440" marT="45720" marB="45720" anchor="ctr">
+                  <a:tcPr anchor="ctr">
                     <a:lnL w="12700" cap="flat" cmpd="sng" algn="ctr">
                       <a:solidFill>
                         <a:srgbClr val="EEEEEE"/>
@@ -4624,7 +4402,7 @@
                     <a:bodyPr/>
                     <a:lstStyle/>
                     <a:p>
-                      <a:pPr algn="ctr" indent="0" marL="0">
+                      <a:pPr marL="0" indent="0" algn="ctr">
                         <a:buNone/>
                       </a:pPr>
                       <a:r>
@@ -4645,7 +4423,7 @@
                       </a:endParaRPr>
                     </a:p>
                   </a:txBody>
-                  <a:tcPr marL="91440" marR="91440" marT="45720" marB="45720" anchor="ctr">
+                  <a:tcPr anchor="ctr">
                     <a:lnL w="12700" cap="flat" cmpd="sng" algn="ctr">
                       <a:solidFill>
                         <a:srgbClr val="EEEEEE"/>
@@ -4687,6 +4465,11 @@
                     </a:solidFill>
                   </a:tcPr>
                 </a:tc>
+                <a:extLst>
+                  <a:ext uri="{0D108BD9-81ED-4DB2-BD59-A6C34878D82A}">
+                    <a16:rowId xmlns:a16="http://schemas.microsoft.com/office/drawing/2014/main" val="10000"/>
+                  </a:ext>
+                </a:extLst>
               </a:tr>
               <a:tr h="566928">
                 <a:tc>
@@ -4694,7 +4477,7 @@
                     <a:bodyPr/>
                     <a:lstStyle/>
                     <a:p>
-                      <a:pPr indent="0" marL="0">
+                      <a:pPr marL="0" indent="0">
                         <a:buNone/>
                       </a:pPr>
                       <a:r>
@@ -4715,7 +4498,7 @@
                       </a:endParaRPr>
                     </a:p>
                   </a:txBody>
-                  <a:tcPr marL="91440" marR="91440" marT="45720" marB="45720" anchor="ctr">
+                  <a:tcPr anchor="ctr">
                     <a:lnL w="12700" cap="flat" cmpd="sng" algn="ctr">
                       <a:solidFill>
                         <a:srgbClr val="EEEEEE"/>
@@ -4762,7 +4545,7 @@
                     <a:bodyPr/>
                     <a:lstStyle/>
                     <a:p>
-                      <a:pPr indent="0" marL="0">
+                      <a:pPr marL="0" indent="0">
                         <a:buNone/>
                       </a:pPr>
                       <a:r>
@@ -4783,7 +4566,7 @@
                       </a:endParaRPr>
                     </a:p>
                   </a:txBody>
-                  <a:tcPr marL="91440" marR="91440" marT="45720" marB="45720" anchor="ctr">
+                  <a:tcPr anchor="ctr">
                     <a:lnL w="12700" cap="flat" cmpd="sng" algn="ctr">
                       <a:solidFill>
                         <a:srgbClr val="EEEEEE"/>
@@ -4825,6 +4608,11 @@
                     </a:solidFill>
                   </a:tcPr>
                 </a:tc>
+                <a:extLst>
+                  <a:ext uri="{0D108BD9-81ED-4DB2-BD59-A6C34878D82A}">
+                    <a16:rowId xmlns:a16="http://schemas.microsoft.com/office/drawing/2014/main" val="10001"/>
+                  </a:ext>
+                </a:extLst>
               </a:tr>
               <a:tr h="566928">
                 <a:tc>
@@ -4832,7 +4620,7 @@
                     <a:bodyPr/>
                     <a:lstStyle/>
                     <a:p>
-                      <a:pPr indent="0" marL="0">
+                      <a:pPr marL="0" indent="0">
                         <a:buNone/>
                       </a:pPr>
                       <a:r>
@@ -4853,7 +4641,7 @@
                       </a:endParaRPr>
                     </a:p>
                   </a:txBody>
-                  <a:tcPr marL="91440" marR="91440" marT="45720" marB="45720" anchor="ctr">
+                  <a:tcPr anchor="ctr">
                     <a:lnL w="12700" cap="flat" cmpd="sng" algn="ctr">
                       <a:solidFill>
                         <a:srgbClr val="EEEEEE"/>
@@ -4900,7 +4688,7 @@
                     <a:bodyPr/>
                     <a:lstStyle/>
                     <a:p>
-                      <a:pPr indent="0" marL="0">
+                      <a:pPr marL="0" indent="0">
                         <a:buNone/>
                       </a:pPr>
                       <a:r>
@@ -4921,7 +4709,7 @@
                       </a:endParaRPr>
                     </a:p>
                   </a:txBody>
-                  <a:tcPr marL="91440" marR="91440" marT="45720" marB="45720" anchor="ctr">
+                  <a:tcPr anchor="ctr">
                     <a:lnL w="12700" cap="flat" cmpd="sng" algn="ctr">
                       <a:solidFill>
                         <a:srgbClr val="EEEEEE"/>
@@ -4963,6 +4751,11 @@
                     </a:solidFill>
                   </a:tcPr>
                 </a:tc>
+                <a:extLst>
+                  <a:ext uri="{0D108BD9-81ED-4DB2-BD59-A6C34878D82A}">
+                    <a16:rowId xmlns:a16="http://schemas.microsoft.com/office/drawing/2014/main" val="10002"/>
+                  </a:ext>
+                </a:extLst>
               </a:tr>
               <a:tr h="566928">
                 <a:tc>
@@ -4970,7 +4763,7 @@
                     <a:bodyPr/>
                     <a:lstStyle/>
                     <a:p>
-                      <a:pPr indent="0" marL="0">
+                      <a:pPr marL="0" indent="0">
                         <a:buNone/>
                       </a:pPr>
                       <a:r>
@@ -4991,7 +4784,7 @@
                       </a:endParaRPr>
                     </a:p>
                   </a:txBody>
-                  <a:tcPr marL="91440" marR="91440" marT="45720" marB="45720" anchor="ctr">
+                  <a:tcPr anchor="ctr">
                     <a:lnL w="12700" cap="flat" cmpd="sng" algn="ctr">
                       <a:solidFill>
                         <a:srgbClr val="EEEEEE"/>
@@ -5038,7 +4831,7 @@
                     <a:bodyPr/>
                     <a:lstStyle/>
                     <a:p>
-                      <a:pPr indent="0" marL="0">
+                      <a:pPr marL="0" indent="0">
                         <a:buNone/>
                       </a:pPr>
                       <a:r>
@@ -5059,7 +4852,7 @@
                       </a:endParaRPr>
                     </a:p>
                   </a:txBody>
-                  <a:tcPr marL="91440" marR="91440" marT="45720" marB="45720" anchor="ctr">
+                  <a:tcPr anchor="ctr">
                     <a:lnL w="12700" cap="flat" cmpd="sng" algn="ctr">
                       <a:solidFill>
                         <a:srgbClr val="EEEEEE"/>
@@ -5101,6 +4894,11 @@
                     </a:solidFill>
                   </a:tcPr>
                 </a:tc>
+                <a:extLst>
+                  <a:ext uri="{0D108BD9-81ED-4DB2-BD59-A6C34878D82A}">
+                    <a16:rowId xmlns:a16="http://schemas.microsoft.com/office/drawing/2014/main" val="10003"/>
+                  </a:ext>
+                </a:extLst>
               </a:tr>
               <a:tr h="566928">
                 <a:tc>
@@ -5108,7 +4906,7 @@
                     <a:bodyPr/>
                     <a:lstStyle/>
                     <a:p>
-                      <a:pPr indent="0" marL="0">
+                      <a:pPr marL="0" indent="0">
                         <a:buNone/>
                       </a:pPr>
                       <a:r>
@@ -5129,7 +4927,7 @@
                       </a:endParaRPr>
                     </a:p>
                   </a:txBody>
-                  <a:tcPr marL="91440" marR="91440" marT="45720" marB="45720" anchor="ctr">
+                  <a:tcPr anchor="ctr">
                     <a:lnL w="12700" cap="flat" cmpd="sng" algn="ctr">
                       <a:solidFill>
                         <a:srgbClr val="EEEEEE"/>
@@ -5176,7 +4974,7 @@
                     <a:bodyPr/>
                     <a:lstStyle/>
                     <a:p>
-                      <a:pPr indent="0" marL="0">
+                      <a:pPr marL="0" indent="0">
                         <a:buNone/>
                       </a:pPr>
                       <a:r>
@@ -5197,7 +4995,7 @@
                       </a:endParaRPr>
                     </a:p>
                   </a:txBody>
-                  <a:tcPr marL="91440" marR="91440" marT="45720" marB="45720" anchor="ctr">
+                  <a:tcPr anchor="ctr">
                     <a:lnL w="12700" cap="flat" cmpd="sng" algn="ctr">
                       <a:solidFill>
                         <a:srgbClr val="EEEEEE"/>
@@ -5239,6 +5037,11 @@
                     </a:solidFill>
                   </a:tcPr>
                 </a:tc>
+                <a:extLst>
+                  <a:ext uri="{0D108BD9-81ED-4DB2-BD59-A6C34878D82A}">
+                    <a16:rowId xmlns:a16="http://schemas.microsoft.com/office/drawing/2014/main" val="10004"/>
+                  </a:ext>
+                </a:extLst>
               </a:tr>
             </a:tbl>
           </a:graphicData>
@@ -5293,6 +5096,13 @@
             <a:prstDash val="solid"/>
           </a:ln>
         </p:spPr>
+        <p:txBody>
+          <a:bodyPr/>
+          <a:lstStyle/>
+          <a:p>
+            <a:endParaRPr lang="es-ES"/>
+          </a:p>
+        </p:txBody>
       </p:sp>
       <p:sp>
         <p:nvSpPr>
@@ -5315,7 +5125,7 @@
           <a:bodyPr wrap="square" rtlCol="0" anchor="ctr"/>
           <a:lstStyle/>
           <a:p>
-            <a:pPr indent="0" marL="0">
+            <a:pPr marL="0" indent="0">
               <a:buNone/>
             </a:pPr>
             <a:r>
@@ -5354,7 +5164,7 @@
           <a:bodyPr wrap="square" rtlCol="0" anchor="ctr"/>
           <a:lstStyle/>
           <a:p>
-            <a:pPr algn="r" indent="0" marL="0">
+            <a:pPr marL="0" indent="0" algn="r">
               <a:buNone/>
             </a:pPr>
             <a:r>
@@ -5396,6 +5206,13 @@
             <a:prstDash val="solid"/>
           </a:ln>
         </p:spPr>
+        <p:txBody>
+          <a:bodyPr/>
+          <a:lstStyle/>
+          <a:p>
+            <a:endParaRPr lang="es-ES"/>
+          </a:p>
+        </p:txBody>
       </p:sp>
       <p:sp>
         <p:nvSpPr>
@@ -5421,6 +5238,13 @@
             <a:prstDash val="solid"/>
           </a:ln>
         </p:spPr>
+        <p:txBody>
+          <a:bodyPr/>
+          <a:lstStyle/>
+          <a:p>
+            <a:endParaRPr lang="es-ES"/>
+          </a:p>
+        </p:txBody>
       </p:sp>
       <p:sp>
         <p:nvSpPr>
@@ -5443,7 +5267,7 @@
           <a:bodyPr wrap="square" rtlCol="0" anchor="t"/>
           <a:lstStyle/>
           <a:p>
-            <a:pPr indent="0" marL="0">
+            <a:pPr marL="0" indent="0">
               <a:buNone/>
             </a:pPr>
             <a:r>
@@ -5460,7 +5284,7 @@
             <a:endParaRPr lang="en-US" sz="1200" dirty="0"/>
           </a:p>
           <a:p>
-            <a:pPr indent="0" marL="0">
+            <a:pPr marL="0" indent="0">
               <a:buNone/>
             </a:pPr>
             <a:r>
@@ -5477,7 +5301,7 @@
             <a:endParaRPr lang="en-US" sz="1200" dirty="0"/>
           </a:p>
           <a:p>
-            <a:pPr indent="0" marL="0">
+            <a:pPr marL="0" indent="0">
               <a:buNone/>
             </a:pPr>
             <a:r>
@@ -5494,13 +5318,13 @@
             <a:endParaRPr lang="en-US" sz="1200" dirty="0"/>
           </a:p>
           <a:p>
-            <a:pPr indent="0" marL="0">
+            <a:pPr marL="0" indent="0">
               <a:buNone/>
             </a:pPr>
             <a:endParaRPr lang="en-US" sz="1200" dirty="0"/>
           </a:p>
           <a:p>
-            <a:pPr indent="0" marL="0">
+            <a:pPr marL="0" indent="0">
               <a:buNone/>
             </a:pPr>
             <a:r>
@@ -5517,13 +5341,13 @@
             <a:endParaRPr lang="en-US" sz="1200" dirty="0"/>
           </a:p>
           <a:p>
-            <a:pPr indent="0" marL="0">
+            <a:pPr marL="0" indent="0">
               <a:buNone/>
             </a:pPr>
             <a:endParaRPr lang="en-US" sz="1200" dirty="0"/>
           </a:p>
           <a:p>
-            <a:pPr indent="0" marL="0">
+            <a:pPr marL="0" indent="0">
               <a:buNone/>
             </a:pPr>
             <a:r>
@@ -5540,7 +5364,7 @@
             <a:endParaRPr lang="en-US" sz="1200" dirty="0"/>
           </a:p>
           <a:p>
-            <a:pPr indent="0" marL="0">
+            <a:pPr marL="0" indent="0">
               <a:buNone/>
             </a:pPr>
             <a:r>
@@ -5557,7 +5381,7 @@
             <a:endParaRPr lang="en-US" sz="1200" dirty="0"/>
           </a:p>
           <a:p>
-            <a:pPr indent="0" marL="0">
+            <a:pPr marL="0" indent="0">
               <a:buNone/>
             </a:pPr>
             <a:r>
@@ -5574,7 +5398,7 @@
             <a:endParaRPr lang="en-US" sz="1200" dirty="0"/>
           </a:p>
           <a:p>
-            <a:pPr indent="0" marL="0">
+            <a:pPr marL="0" indent="0">
               <a:buNone/>
             </a:pPr>
             <a:r>
@@ -5591,13 +5415,13 @@
             <a:endParaRPr lang="en-US" sz="1200" dirty="0"/>
           </a:p>
           <a:p>
-            <a:pPr indent="0" marL="0">
+            <a:pPr marL="0" indent="0">
               <a:buNone/>
             </a:pPr>
             <a:endParaRPr lang="en-US" sz="1200" dirty="0"/>
           </a:p>
           <a:p>
-            <a:pPr indent="0" marL="0">
+            <a:pPr marL="0" indent="0">
               <a:buNone/>
             </a:pPr>
             <a:r>
@@ -5614,7 +5438,7 @@
             <a:endParaRPr lang="en-US" sz="1200" dirty="0"/>
           </a:p>
           <a:p>
-            <a:pPr indent="0" marL="0">
+            <a:pPr marL="0" indent="0">
               <a:buNone/>
             </a:pPr>
             <a:r>
@@ -5631,7 +5455,7 @@
             <a:endParaRPr lang="en-US" sz="1200" dirty="0"/>
           </a:p>
           <a:p>
-            <a:pPr indent="0" marL="0">
+            <a:pPr marL="0" indent="0">
               <a:buNone/>
             </a:pPr>
             <a:r>
@@ -5648,7 +5472,7 @@
             <a:endParaRPr lang="en-US" sz="1200" dirty="0"/>
           </a:p>
           <a:p>
-            <a:pPr indent="0" marL="0">
+            <a:pPr marL="0" indent="0">
               <a:buNone/>
             </a:pPr>
             <a:r>
@@ -5665,7 +5489,7 @@
             <a:endParaRPr lang="en-US" sz="1200" dirty="0"/>
           </a:p>
           <a:p>
-            <a:pPr indent="0" marL="0">
+            <a:pPr marL="0" indent="0">
               <a:buNone/>
             </a:pPr>
             <a:r>
@@ -5682,7 +5506,7 @@
             <a:endParaRPr lang="en-US" sz="1200" dirty="0"/>
           </a:p>
           <a:p>
-            <a:pPr indent="0" marL="0">
+            <a:pPr marL="0" indent="0">
               <a:buNone/>
             </a:pPr>
             <a:r>
@@ -5699,7 +5523,7 @@
             <a:endParaRPr lang="en-US" sz="1200" dirty="0"/>
           </a:p>
           <a:p>
-            <a:pPr indent="0" marL="0">
+            <a:pPr marL="0" indent="0">
               <a:buNone/>
             </a:pPr>
             <a:r>
@@ -5766,6 +5590,13 @@
             <a:prstDash val="solid"/>
           </a:ln>
         </p:spPr>
+        <p:txBody>
+          <a:bodyPr/>
+          <a:lstStyle/>
+          <a:p>
+            <a:endParaRPr lang="es-ES"/>
+          </a:p>
+        </p:txBody>
       </p:sp>
       <p:sp>
         <p:nvSpPr>
@@ -5788,7 +5619,7 @@
           <a:bodyPr wrap="square" rtlCol="0" anchor="ctr"/>
           <a:lstStyle/>
           <a:p>
-            <a:pPr indent="0" marL="0">
+            <a:pPr marL="0" indent="0">
               <a:buNone/>
             </a:pPr>
             <a:r>
@@ -5827,7 +5658,7 @@
           <a:bodyPr wrap="square" rtlCol="0" anchor="ctr"/>
           <a:lstStyle/>
           <a:p>
-            <a:pPr algn="r" indent="0" marL="0">
+            <a:pPr marL="0" indent="0" algn="r">
               <a:buNone/>
             </a:pPr>
             <a:r>
@@ -5866,7 +5697,7 @@
           <a:bodyPr wrap="square" rtlCol="0" anchor="t"/>
           <a:lstStyle/>
           <a:p>
-            <a:pPr indent="0" marL="0">
+            <a:pPr marL="0" indent="0">
               <a:buNone/>
             </a:pPr>
             <a:r>
@@ -5908,6 +5739,13 @@
             <a:prstDash val="solid"/>
           </a:ln>
         </p:spPr>
+        <p:txBody>
+          <a:bodyPr/>
+          <a:lstStyle/>
+          <a:p>
+            <a:endParaRPr lang="es-ES"/>
+          </a:p>
+        </p:txBody>
       </p:sp>
       <p:sp>
         <p:nvSpPr>
@@ -5930,7 +5768,7 @@
           <a:bodyPr wrap="square" rtlCol="0" anchor="t"/>
           <a:lstStyle/>
           <a:p>
-            <a:pPr indent="0" marL="0">
+            <a:pPr marL="0" indent="0">
               <a:buNone/>
             </a:pPr>
             <a:r>
@@ -5948,7 +5786,7 @@
             <a:endParaRPr lang="en-US" sz="1650" dirty="0"/>
           </a:p>
           <a:p>
-            <a:pPr indent="0" marL="0">
+            <a:pPr marL="0" indent="0">
               <a:buNone/>
             </a:pPr>
             <a:r>
@@ -6015,6 +5853,13 @@
             <a:prstDash val="solid"/>
           </a:ln>
         </p:spPr>
+        <p:txBody>
+          <a:bodyPr/>
+          <a:lstStyle/>
+          <a:p>
+            <a:endParaRPr lang="es-ES"/>
+          </a:p>
+        </p:txBody>
       </p:sp>
       <p:sp>
         <p:nvSpPr>
@@ -6037,7 +5882,7 @@
           <a:bodyPr wrap="square" rtlCol="0" anchor="ctr"/>
           <a:lstStyle/>
           <a:p>
-            <a:pPr indent="0" marL="0">
+            <a:pPr marL="0" indent="0">
               <a:buNone/>
             </a:pPr>
             <a:r>
@@ -6076,7 +5921,7 @@
           <a:bodyPr wrap="square" rtlCol="0" anchor="ctr"/>
           <a:lstStyle/>
           <a:p>
-            <a:pPr algn="r" indent="0" marL="0">
+            <a:pPr marL="0" indent="0" algn="r">
               <a:buNone/>
             </a:pPr>
             <a:r>
@@ -6115,7 +5960,7 @@
           <a:bodyPr wrap="square" rtlCol="0" anchor="t"/>
           <a:lstStyle/>
           <a:p>
-            <a:pPr indent="0" marL="0">
+            <a:pPr marL="0" indent="0">
               <a:buNone/>
             </a:pPr>
             <a:r>
@@ -6157,6 +6002,13 @@
             <a:prstDash val="solid"/>
           </a:ln>
         </p:spPr>
+        <p:txBody>
+          <a:bodyPr/>
+          <a:lstStyle/>
+          <a:p>
+            <a:endParaRPr lang="es-ES"/>
+          </a:p>
+        </p:txBody>
       </p:sp>
       <p:sp>
         <p:nvSpPr>
@@ -6182,6 +6034,13 @@
             <a:prstDash val="solid"/>
           </a:ln>
         </p:spPr>
+        <p:txBody>
+          <a:bodyPr/>
+          <a:lstStyle/>
+          <a:p>
+            <a:endParaRPr lang="es-ES"/>
+          </a:p>
+        </p:txBody>
       </p:sp>
       <p:sp>
         <p:nvSpPr>
@@ -6204,7 +6063,7 @@
           <a:bodyPr wrap="square" rtlCol="0" anchor="t"/>
           <a:lstStyle/>
           <a:p>
-            <a:pPr indent="0" marL="0">
+            <a:pPr marL="0" indent="0">
               <a:buNone/>
             </a:pPr>
             <a:r>
@@ -6221,7 +6080,7 @@
             <a:endParaRPr lang="en-US" sz="1650" dirty="0"/>
           </a:p>
           <a:p>
-            <a:pPr indent="0" marL="0">
+            <a:pPr marL="0" indent="0">
               <a:buNone/>
             </a:pPr>
             <a:r>
@@ -6238,7 +6097,7 @@
             <a:endParaRPr lang="en-US" sz="1650" dirty="0"/>
           </a:p>
           <a:p>
-            <a:pPr indent="0" marL="0">
+            <a:pPr marL="0" indent="0">
               <a:buNone/>
             </a:pPr>
             <a:r>
@@ -6255,7 +6114,7 @@
             <a:endParaRPr lang="en-US" sz="1650" dirty="0"/>
           </a:p>
           <a:p>
-            <a:pPr indent="0" marL="0">
+            <a:pPr marL="0" indent="0">
               <a:buNone/>
             </a:pPr>
             <a:r>
@@ -6272,7 +6131,7 @@
             <a:endParaRPr lang="en-US" sz="1650" dirty="0"/>
           </a:p>
           <a:p>
-            <a:pPr indent="0" marL="0">
+            <a:pPr marL="0" indent="0">
               <a:buNone/>
             </a:pPr>
             <a:r>
@@ -6289,7 +6148,7 @@
             <a:endParaRPr lang="en-US" sz="1650" dirty="0"/>
           </a:p>
           <a:p>
-            <a:pPr indent="0" marL="0">
+            <a:pPr marL="0" indent="0">
               <a:buNone/>
             </a:pPr>
             <a:r>
@@ -6356,6 +6215,13 @@
             <a:prstDash val="solid"/>
           </a:ln>
         </p:spPr>
+        <p:txBody>
+          <a:bodyPr/>
+          <a:lstStyle/>
+          <a:p>
+            <a:endParaRPr lang="es-ES"/>
+          </a:p>
+        </p:txBody>
       </p:sp>
       <p:sp>
         <p:nvSpPr>
@@ -6378,7 +6244,7 @@
           <a:bodyPr wrap="square" rtlCol="0" anchor="ctr"/>
           <a:lstStyle/>
           <a:p>
-            <a:pPr indent="0" marL="0">
+            <a:pPr marL="0" indent="0">
               <a:buNone/>
             </a:pPr>
             <a:r>
@@ -6417,7 +6283,7 @@
           <a:bodyPr wrap="square" rtlCol="0" anchor="ctr"/>
           <a:lstStyle/>
           <a:p>
-            <a:pPr algn="r" indent="0" marL="0">
+            <a:pPr marL="0" indent="0" algn="r">
               <a:buNone/>
             </a:pPr>
             <a:r>
@@ -6459,6 +6325,13 @@
             <a:prstDash val="solid"/>
           </a:ln>
         </p:spPr>
+        <p:txBody>
+          <a:bodyPr/>
+          <a:lstStyle/>
+          <a:p>
+            <a:endParaRPr lang="es-ES"/>
+          </a:p>
+        </p:txBody>
       </p:sp>
       <p:sp>
         <p:nvSpPr>
@@ -6484,6 +6357,13 @@
             <a:prstDash val="solid"/>
           </a:ln>
         </p:spPr>
+        <p:txBody>
+          <a:bodyPr/>
+          <a:lstStyle/>
+          <a:p>
+            <a:endParaRPr lang="es-ES"/>
+          </a:p>
+        </p:txBody>
       </p:sp>
       <p:sp>
         <p:nvSpPr>
@@ -6506,7 +6386,7 @@
           <a:bodyPr wrap="square" rtlCol="0" anchor="t"/>
           <a:lstStyle/>
           <a:p>
-            <a:pPr indent="0" marL="0">
+            <a:pPr marL="0" indent="0">
               <a:buNone/>
             </a:pPr>
             <a:r>
@@ -6523,7 +6403,7 @@
             <a:endParaRPr lang="en-US" sz="1200" dirty="0"/>
           </a:p>
           <a:p>
-            <a:pPr indent="0" marL="0">
+            <a:pPr marL="0" indent="0">
               <a:buNone/>
             </a:pPr>
             <a:r>
@@ -6540,7 +6420,7 @@
             <a:endParaRPr lang="en-US" sz="1200" dirty="0"/>
           </a:p>
           <a:p>
-            <a:pPr indent="0" marL="0">
+            <a:pPr marL="0" indent="0">
               <a:buNone/>
             </a:pPr>
             <a:r>
@@ -6557,7 +6437,7 @@
             <a:endParaRPr lang="en-US" sz="1200" dirty="0"/>
           </a:p>
           <a:p>
-            <a:pPr indent="0" marL="0">
+            <a:pPr marL="0" indent="0">
               <a:buNone/>
             </a:pPr>
             <a:r>
@@ -6574,13 +6454,13 @@
             <a:endParaRPr lang="en-US" sz="1200" dirty="0"/>
           </a:p>
           <a:p>
-            <a:pPr indent="0" marL="0">
+            <a:pPr marL="0" indent="0">
               <a:buNone/>
             </a:pPr>
             <a:endParaRPr lang="en-US" sz="1200" dirty="0"/>
           </a:p>
           <a:p>
-            <a:pPr indent="0" marL="0">
+            <a:pPr marL="0" indent="0">
               <a:buNone/>
             </a:pPr>
             <a:r>
@@ -6597,7 +6477,7 @@
             <a:endParaRPr lang="en-US" sz="1200" dirty="0"/>
           </a:p>
           <a:p>
-            <a:pPr indent="0" marL="0">
+            <a:pPr marL="0" indent="0">
               <a:buNone/>
             </a:pPr>
             <a:r>
@@ -6614,13 +6494,13 @@
             <a:endParaRPr lang="en-US" sz="1200" dirty="0"/>
           </a:p>
           <a:p>
-            <a:pPr indent="0" marL="0">
+            <a:pPr marL="0" indent="0">
               <a:buNone/>
             </a:pPr>
             <a:endParaRPr lang="en-US" sz="1200" dirty="0"/>
           </a:p>
           <a:p>
-            <a:pPr indent="0" marL="0">
+            <a:pPr marL="0" indent="0">
               <a:buNone/>
             </a:pPr>
             <a:r>
@@ -6637,7 +6517,7 @@
             <a:endParaRPr lang="en-US" sz="1200" dirty="0"/>
           </a:p>
           <a:p>
-            <a:pPr indent="0" marL="0">
+            <a:pPr marL="0" indent="0">
               <a:buNone/>
             </a:pPr>
             <a:r>
@@ -6654,7 +6534,7 @@
             <a:endParaRPr lang="en-US" sz="1200" dirty="0"/>
           </a:p>
           <a:p>
-            <a:pPr indent="0" marL="0">
+            <a:pPr marL="0" indent="0">
               <a:buNone/>
             </a:pPr>
             <a:r>
@@ -6671,7 +6551,7 @@
             <a:endParaRPr lang="en-US" sz="1200" dirty="0"/>
           </a:p>
           <a:p>
-            <a:pPr indent="0" marL="0">
+            <a:pPr marL="0" indent="0">
               <a:buNone/>
             </a:pPr>
             <a:r>
@@ -6688,7 +6568,7 @@
             <a:endParaRPr lang="en-US" sz="1200" dirty="0"/>
           </a:p>
           <a:p>
-            <a:pPr indent="0" marL="0">
+            <a:pPr marL="0" indent="0">
               <a:buNone/>
             </a:pPr>
             <a:r>
@@ -6705,7 +6585,7 @@
             <a:endParaRPr lang="en-US" sz="1200" dirty="0"/>
           </a:p>
           <a:p>
-            <a:pPr indent="0" marL="0">
+            <a:pPr marL="0" indent="0">
               <a:buNone/>
             </a:pPr>
             <a:r>
@@ -6722,7 +6602,7 @@
             <a:endParaRPr lang="en-US" sz="1200" dirty="0"/>
           </a:p>
           <a:p>
-            <a:pPr indent="0" marL="0">
+            <a:pPr marL="0" indent="0">
               <a:buNone/>
             </a:pPr>
             <a:r>
@@ -6739,7 +6619,7 @@
             <a:endParaRPr lang="en-US" sz="1200" dirty="0"/>
           </a:p>
           <a:p>
-            <a:pPr indent="0" marL="0">
+            <a:pPr marL="0" indent="0">
               <a:buNone/>
             </a:pPr>
             <a:r>
@@ -6756,7 +6636,7 @@
             <a:endParaRPr lang="en-US" sz="1200" dirty="0"/>
           </a:p>
           <a:p>
-            <a:pPr indent="0" marL="0">
+            <a:pPr marL="0" indent="0">
               <a:buNone/>
             </a:pPr>
             <a:r>
@@ -6773,7 +6653,7 @@
             <a:endParaRPr lang="en-US" sz="1200" dirty="0"/>
           </a:p>
           <a:p>
-            <a:pPr indent="0" marL="0">
+            <a:pPr marL="0" indent="0">
               <a:buNone/>
             </a:pPr>
             <a:r>
@@ -6840,6 +6720,13 @@
             <a:prstDash val="solid"/>
           </a:ln>
         </p:spPr>
+        <p:txBody>
+          <a:bodyPr/>
+          <a:lstStyle/>
+          <a:p>
+            <a:endParaRPr lang="es-ES"/>
+          </a:p>
+        </p:txBody>
       </p:sp>
       <p:sp>
         <p:nvSpPr>
@@ -6862,7 +6749,7 @@
           <a:bodyPr wrap="square" rtlCol="0" anchor="ctr"/>
           <a:lstStyle/>
           <a:p>
-            <a:pPr indent="0" marL="0">
+            <a:pPr marL="0" indent="0">
               <a:buNone/>
             </a:pPr>
             <a:r>
@@ -6901,7 +6788,7 @@
           <a:bodyPr wrap="square" rtlCol="0" anchor="ctr"/>
           <a:lstStyle/>
           <a:p>
-            <a:pPr algn="r" indent="0" marL="0">
+            <a:pPr marL="0" indent="0" algn="r">
               <a:buNone/>
             </a:pPr>
             <a:r>
@@ -6943,6 +6830,13 @@
             <a:prstDash val="solid"/>
           </a:ln>
         </p:spPr>
+        <p:txBody>
+          <a:bodyPr/>
+          <a:lstStyle/>
+          <a:p>
+            <a:endParaRPr lang="es-ES"/>
+          </a:p>
+        </p:txBody>
       </p:sp>
       <p:sp>
         <p:nvSpPr>
@@ -6965,7 +6859,7 @@
           <a:bodyPr wrap="square" rtlCol="0" anchor="ctr"/>
           <a:lstStyle/>
           <a:p>
-            <a:pPr indent="0" marL="0">
+            <a:pPr marL="0" indent="0">
               <a:buNone/>
             </a:pPr>
             <a:r>
@@ -7004,7 +6898,7 @@
           <a:bodyPr wrap="square" rtlCol="0" anchor="t"/>
           <a:lstStyle/>
           <a:p>
-            <a:pPr indent="0" marL="0">
+            <a:pPr marL="0" indent="0">
               <a:buNone/>
             </a:pPr>
             <a:r>
@@ -7071,6 +6965,13 @@
             <a:prstDash val="solid"/>
           </a:ln>
         </p:spPr>
+        <p:txBody>
+          <a:bodyPr/>
+          <a:lstStyle/>
+          <a:p>
+            <a:endParaRPr lang="es-ES"/>
+          </a:p>
+        </p:txBody>
       </p:sp>
       <p:sp>
         <p:nvSpPr>
@@ -7093,7 +6994,7 @@
           <a:bodyPr wrap="square" rtlCol="0" anchor="ctr"/>
           <a:lstStyle/>
           <a:p>
-            <a:pPr indent="0" marL="0">
+            <a:pPr marL="0" indent="0">
               <a:buNone/>
             </a:pPr>
             <a:r>
@@ -7132,7 +7033,7 @@
           <a:bodyPr wrap="square" rtlCol="0" anchor="ctr"/>
           <a:lstStyle/>
           <a:p>
-            <a:pPr algn="r" indent="0" marL="0">
+            <a:pPr marL="0" indent="0" algn="r">
               <a:buNone/>
             </a:pPr>
             <a:r>
@@ -7174,6 +7075,13 @@
             <a:prstDash val="solid"/>
           </a:ln>
         </p:spPr>
+        <p:txBody>
+          <a:bodyPr/>
+          <a:lstStyle/>
+          <a:p>
+            <a:endParaRPr lang="es-ES"/>
+          </a:p>
+        </p:txBody>
       </p:sp>
       <p:sp>
         <p:nvSpPr>
@@ -7196,7 +7104,7 @@
           <a:bodyPr wrap="square" rtlCol="0" anchor="t"/>
           <a:lstStyle/>
           <a:p>
-            <a:pPr indent="0" marL="0">
+            <a:pPr marL="0" indent="0">
               <a:buNone/>
             </a:pPr>
             <a:r>
@@ -7214,7 +7122,7 @@
             <a:endParaRPr lang="en-US" sz="2000" dirty="0"/>
           </a:p>
           <a:p>
-            <a:pPr indent="0" marL="0">
+            <a:pPr marL="0" indent="0">
               <a:buNone/>
             </a:pPr>
             <a:r>
@@ -7281,6 +7189,13 @@
             <a:prstDash val="solid"/>
           </a:ln>
         </p:spPr>
+        <p:txBody>
+          <a:bodyPr/>
+          <a:lstStyle/>
+          <a:p>
+            <a:endParaRPr lang="es-ES"/>
+          </a:p>
+        </p:txBody>
       </p:sp>
       <p:sp>
         <p:nvSpPr>
@@ -7303,7 +7218,7 @@
           <a:bodyPr wrap="square" rtlCol="0" anchor="ctr"/>
           <a:lstStyle/>
           <a:p>
-            <a:pPr indent="0" marL="0">
+            <a:pPr marL="0" indent="0">
               <a:buNone/>
             </a:pPr>
             <a:r>
@@ -7342,7 +7257,7 @@
           <a:bodyPr wrap="square" rtlCol="0" anchor="ctr"/>
           <a:lstStyle/>
           <a:p>
-            <a:pPr algn="r" indent="0" marL="0">
+            <a:pPr marL="0" indent="0" algn="r">
               <a:buNone/>
             </a:pPr>
             <a:r>
@@ -7381,7 +7296,7 @@
           <a:bodyPr wrap="square" rtlCol="0" anchor="t"/>
           <a:lstStyle/>
           <a:p>
-            <a:pPr indent="0" marL="0">
+            <a:pPr marL="0" indent="0">
               <a:buNone/>
             </a:pPr>
             <a:r>
@@ -7423,6 +7338,13 @@
             <a:prstDash val="solid"/>
           </a:ln>
         </p:spPr>
+        <p:txBody>
+          <a:bodyPr/>
+          <a:lstStyle/>
+          <a:p>
+            <a:endParaRPr lang="es-ES"/>
+          </a:p>
+        </p:txBody>
       </p:sp>
       <p:sp>
         <p:nvSpPr>
@@ -7445,7 +7367,7 @@
           <a:bodyPr wrap="square" rtlCol="0" anchor="ctr"/>
           <a:lstStyle/>
           <a:p>
-            <a:pPr indent="0" marL="0">
+            <a:pPr marL="0" indent="0">
               <a:buNone/>
             </a:pPr>
             <a:r>
@@ -7512,6 +7434,13 @@
             <a:prstDash val="solid"/>
           </a:ln>
         </p:spPr>
+        <p:txBody>
+          <a:bodyPr/>
+          <a:lstStyle/>
+          <a:p>
+            <a:endParaRPr lang="es-ES"/>
+          </a:p>
+        </p:txBody>
       </p:sp>
       <p:sp>
         <p:nvSpPr>
@@ -7534,7 +7463,7 @@
           <a:bodyPr wrap="square" rtlCol="0" anchor="ctr"/>
           <a:lstStyle/>
           <a:p>
-            <a:pPr indent="0" marL="0">
+            <a:pPr marL="0" indent="0">
               <a:buNone/>
             </a:pPr>
             <a:r>
@@ -7573,7 +7502,7 @@
           <a:bodyPr wrap="square" rtlCol="0" anchor="ctr"/>
           <a:lstStyle/>
           <a:p>
-            <a:pPr algn="r" indent="0" marL="0">
+            <a:pPr marL="0" indent="0" algn="r">
               <a:buNone/>
             </a:pPr>
             <a:r>
@@ -7612,7 +7541,7 @@
           <a:bodyPr wrap="square" rtlCol="0" anchor="t"/>
           <a:lstStyle/>
           <a:p>
-            <a:pPr indent="0" marL="0">
+            <a:pPr marL="0" indent="0">
               <a:buNone/>
             </a:pPr>
             <a:r>
@@ -7654,6 +7583,13 @@
             <a:prstDash val="solid"/>
           </a:ln>
         </p:spPr>
+        <p:txBody>
+          <a:bodyPr/>
+          <a:lstStyle/>
+          <a:p>
+            <a:endParaRPr lang="es-ES"/>
+          </a:p>
+        </p:txBody>
       </p:sp>
       <p:sp>
         <p:nvSpPr>
@@ -7679,6 +7615,13 @@
             <a:prstDash val="solid"/>
           </a:ln>
         </p:spPr>
+        <p:txBody>
+          <a:bodyPr/>
+          <a:lstStyle/>
+          <a:p>
+            <a:endParaRPr lang="es-ES"/>
+          </a:p>
+        </p:txBody>
       </p:sp>
       <p:sp>
         <p:nvSpPr>
@@ -7701,7 +7644,7 @@
           <a:bodyPr wrap="square" rtlCol="0" anchor="t"/>
           <a:lstStyle/>
           <a:p>
-            <a:pPr indent="0" marL="0">
+            <a:pPr marL="0" indent="0">
               <a:buNone/>
             </a:pPr>
             <a:r>
@@ -7740,7 +7683,7 @@
           <a:bodyPr wrap="square" rtlCol="0" anchor="t"/>
           <a:lstStyle/>
           <a:p>
-            <a:pPr indent="0" marL="0">
+            <a:pPr marL="0" indent="0">
               <a:buNone/>
             </a:pPr>
             <a:r>
@@ -7807,6 +7750,13 @@
             <a:prstDash val="solid"/>
           </a:ln>
         </p:spPr>
+        <p:txBody>
+          <a:bodyPr/>
+          <a:lstStyle/>
+          <a:p>
+            <a:endParaRPr lang="es-ES"/>
+          </a:p>
+        </p:txBody>
       </p:sp>
       <p:sp>
         <p:nvSpPr>
@@ -7829,7 +7779,7 @@
           <a:bodyPr wrap="square" rtlCol="0" anchor="ctr"/>
           <a:lstStyle/>
           <a:p>
-            <a:pPr indent="0" marL="0">
+            <a:pPr marL="0" indent="0">
               <a:buNone/>
             </a:pPr>
             <a:r>
@@ -7868,7 +7818,7 @@
           <a:bodyPr wrap="square" rtlCol="0" anchor="ctr"/>
           <a:lstStyle/>
           <a:p>
-            <a:pPr algn="r" indent="0" marL="0">
+            <a:pPr marL="0" indent="0" algn="r">
               <a:buNone/>
             </a:pPr>
             <a:r>
@@ -7910,6 +7860,13 @@
             <a:prstDash val="solid"/>
           </a:ln>
         </p:spPr>
+        <p:txBody>
+          <a:bodyPr/>
+          <a:lstStyle/>
+          <a:p>
+            <a:endParaRPr lang="es-ES"/>
+          </a:p>
+        </p:txBody>
       </p:sp>
       <p:sp>
         <p:nvSpPr>
@@ -7935,6 +7892,13 @@
             <a:prstDash val="solid"/>
           </a:ln>
         </p:spPr>
+        <p:txBody>
+          <a:bodyPr/>
+          <a:lstStyle/>
+          <a:p>
+            <a:endParaRPr lang="es-ES"/>
+          </a:p>
+        </p:txBody>
       </p:sp>
       <p:sp>
         <p:nvSpPr>
@@ -7957,7 +7921,7 @@
           <a:bodyPr wrap="square" rtlCol="0" anchor="t"/>
           <a:lstStyle/>
           <a:p>
-            <a:pPr indent="0" marL="0">
+            <a:pPr marL="0" indent="0">
               <a:buNone/>
             </a:pPr>
             <a:r>
@@ -7974,7 +7938,7 @@
             <a:endParaRPr lang="en-US" sz="1150" dirty="0"/>
           </a:p>
           <a:p>
-            <a:pPr indent="0" marL="0">
+            <a:pPr marL="0" indent="0">
               <a:buNone/>
             </a:pPr>
             <a:r>
@@ -7991,7 +7955,7 @@
             <a:endParaRPr lang="en-US" sz="1150" dirty="0"/>
           </a:p>
           <a:p>
-            <a:pPr indent="0" marL="0">
+            <a:pPr marL="0" indent="0">
               <a:buNone/>
             </a:pPr>
             <a:r>
@@ -8008,13 +7972,13 @@
             <a:endParaRPr lang="en-US" sz="1150" dirty="0"/>
           </a:p>
           <a:p>
-            <a:pPr indent="0" marL="0">
+            <a:pPr marL="0" indent="0">
               <a:buNone/>
             </a:pPr>
             <a:endParaRPr lang="en-US" sz="1150" dirty="0"/>
           </a:p>
           <a:p>
-            <a:pPr indent="0" marL="0">
+            <a:pPr marL="0" indent="0">
               <a:buNone/>
             </a:pPr>
             <a:r>
@@ -8031,7 +7995,7 @@
             <a:endParaRPr lang="en-US" sz="1150" dirty="0"/>
           </a:p>
           <a:p>
-            <a:pPr indent="0" marL="0">
+            <a:pPr marL="0" indent="0">
               <a:buNone/>
             </a:pPr>
             <a:r>
@@ -8048,13 +8012,13 @@
             <a:endParaRPr lang="en-US" sz="1150" dirty="0"/>
           </a:p>
           <a:p>
-            <a:pPr indent="0" marL="0">
+            <a:pPr marL="0" indent="0">
               <a:buNone/>
             </a:pPr>
             <a:endParaRPr lang="en-US" sz="1150" dirty="0"/>
           </a:p>
           <a:p>
-            <a:pPr indent="0" marL="0">
+            <a:pPr marL="0" indent="0">
               <a:buNone/>
             </a:pPr>
             <a:r>
@@ -8071,7 +8035,7 @@
             <a:endParaRPr lang="en-US" sz="1150" dirty="0"/>
           </a:p>
           <a:p>
-            <a:pPr indent="0" marL="0">
+            <a:pPr marL="0" indent="0">
               <a:buNone/>
             </a:pPr>
             <a:r>
@@ -8088,13 +8052,13 @@
             <a:endParaRPr lang="en-US" sz="1150" dirty="0"/>
           </a:p>
           <a:p>
-            <a:pPr indent="0" marL="0">
+            <a:pPr marL="0" indent="0">
               <a:buNone/>
             </a:pPr>
             <a:endParaRPr lang="en-US" sz="1150" dirty="0"/>
           </a:p>
           <a:p>
-            <a:pPr indent="0" marL="0">
+            <a:pPr marL="0" indent="0">
               <a:buNone/>
             </a:pPr>
             <a:r>
@@ -8111,7 +8075,7 @@
             <a:endParaRPr lang="en-US" sz="1150" dirty="0"/>
           </a:p>
           <a:p>
-            <a:pPr indent="0" marL="0">
+            <a:pPr marL="0" indent="0">
               <a:buNone/>
             </a:pPr>
             <a:r>
@@ -8128,7 +8092,7 @@
             <a:endParaRPr lang="en-US" sz="1150" dirty="0"/>
           </a:p>
           <a:p>
-            <a:pPr indent="0" marL="0">
+            <a:pPr marL="0" indent="0">
               <a:buNone/>
             </a:pPr>
             <a:r>
@@ -8145,7 +8109,7 @@
             <a:endParaRPr lang="en-US" sz="1150" dirty="0"/>
           </a:p>
           <a:p>
-            <a:pPr indent="0" marL="0">
+            <a:pPr marL="0" indent="0">
               <a:buNone/>
             </a:pPr>
             <a:r>
@@ -8162,7 +8126,7 @@
             <a:endParaRPr lang="en-US" sz="1150" dirty="0"/>
           </a:p>
           <a:p>
-            <a:pPr indent="0" marL="0">
+            <a:pPr marL="0" indent="0">
               <a:buNone/>
             </a:pPr>
             <a:r>
@@ -8179,7 +8143,7 @@
             <a:endParaRPr lang="en-US" sz="1150" dirty="0"/>
           </a:p>
           <a:p>
-            <a:pPr indent="0" marL="0">
+            <a:pPr marL="0" indent="0">
               <a:buNone/>
             </a:pPr>
             <a:r>
@@ -8196,7 +8160,7 @@
             <a:endParaRPr lang="en-US" sz="1150" dirty="0"/>
           </a:p>
           <a:p>
-            <a:pPr indent="0" marL="0">
+            <a:pPr marL="0" indent="0">
               <a:buNone/>
             </a:pPr>
             <a:r>
@@ -8213,7 +8177,7 @@
             <a:endParaRPr lang="en-US" sz="1150" dirty="0"/>
           </a:p>
           <a:p>
-            <a:pPr indent="0" marL="0">
+            <a:pPr marL="0" indent="0">
               <a:buNone/>
             </a:pPr>
             <a:r>
@@ -8230,7 +8194,7 @@
             <a:endParaRPr lang="en-US" sz="1150" dirty="0"/>
           </a:p>
           <a:p>
-            <a:pPr indent="0" marL="0">
+            <a:pPr marL="0" indent="0">
               <a:buNone/>
             </a:pPr>
             <a:r>
@@ -8247,7 +8211,7 @@
             <a:endParaRPr lang="en-US" sz="1150" dirty="0"/>
           </a:p>
           <a:p>
-            <a:pPr indent="0" marL="0">
+            <a:pPr marL="0" indent="0">
               <a:buNone/>
             </a:pPr>
             <a:r>
@@ -8264,7 +8228,7 @@
             <a:endParaRPr lang="en-US" sz="1150" dirty="0"/>
           </a:p>
           <a:p>
-            <a:pPr indent="0" marL="0">
+            <a:pPr marL="0" indent="0">
               <a:buNone/>
             </a:pPr>
             <a:r>
@@ -8331,6 +8295,13 @@
             <a:prstDash val="solid"/>
           </a:ln>
         </p:spPr>
+        <p:txBody>
+          <a:bodyPr/>
+          <a:lstStyle/>
+          <a:p>
+            <a:endParaRPr lang="es-ES"/>
+          </a:p>
+        </p:txBody>
       </p:sp>
       <p:sp>
         <p:nvSpPr>
@@ -8353,7 +8324,7 @@
           <a:bodyPr wrap="square" rtlCol="0" anchor="ctr"/>
           <a:lstStyle/>
           <a:p>
-            <a:pPr indent="0" marL="0">
+            <a:pPr marL="0" indent="0">
               <a:buNone/>
             </a:pPr>
             <a:r>
@@ -8392,7 +8363,7 @@
           <a:bodyPr wrap="square" rtlCol="0" anchor="ctr"/>
           <a:lstStyle/>
           <a:p>
-            <a:pPr algn="r" indent="0" marL="0">
+            <a:pPr marL="0" indent="0" algn="r">
               <a:buNone/>
             </a:pPr>
             <a:r>
@@ -8434,6 +8405,13 @@
             <a:prstDash val="solid"/>
           </a:ln>
         </p:spPr>
+        <p:txBody>
+          <a:bodyPr/>
+          <a:lstStyle/>
+          <a:p>
+            <a:endParaRPr lang="es-ES"/>
+          </a:p>
+        </p:txBody>
       </p:sp>
       <p:sp>
         <p:nvSpPr>
@@ -8456,7 +8434,7 @@
           <a:bodyPr wrap="square" rtlCol="0" anchor="ctr"/>
           <a:lstStyle/>
           <a:p>
-            <a:pPr indent="0" marL="0">
+            <a:pPr marL="0" indent="0">
               <a:buNone/>
             </a:pPr>
             <a:r>
@@ -8495,7 +8473,7 @@
           <a:bodyPr wrap="square" rtlCol="0" anchor="t"/>
           <a:lstStyle/>
           <a:p>
-            <a:pPr indent="0" marL="0">
+            <a:pPr marL="0" indent="0">
               <a:buNone/>
             </a:pPr>
             <a:r>
@@ -8562,6 +8540,13 @@
             <a:prstDash val="solid"/>
           </a:ln>
         </p:spPr>
+        <p:txBody>
+          <a:bodyPr/>
+          <a:lstStyle/>
+          <a:p>
+            <a:endParaRPr lang="es-ES"/>
+          </a:p>
+        </p:txBody>
       </p:sp>
       <p:sp>
         <p:nvSpPr>
@@ -8584,7 +8569,7 @@
           <a:bodyPr wrap="square" rtlCol="0" anchor="ctr"/>
           <a:lstStyle/>
           <a:p>
-            <a:pPr indent="0" marL="0">
+            <a:pPr marL="0" indent="0">
               <a:buNone/>
             </a:pPr>
             <a:r>
@@ -8623,7 +8608,7 @@
           <a:bodyPr wrap="square" rtlCol="0" anchor="ctr"/>
           <a:lstStyle/>
           <a:p>
-            <a:pPr algn="r" indent="0" marL="0">
+            <a:pPr marL="0" indent="0" algn="r">
               <a:buNone/>
             </a:pPr>
             <a:r>
@@ -8662,7 +8647,7 @@
           <a:bodyPr wrap="square" rtlCol="0" anchor="t"/>
           <a:lstStyle/>
           <a:p>
-            <a:pPr indent="0" marL="0">
+            <a:pPr marL="0" indent="0">
               <a:buNone/>
             </a:pPr>
             <a:r>
@@ -8704,6 +8689,13 @@
             <a:prstDash val="solid"/>
           </a:ln>
         </p:spPr>
+        <p:txBody>
+          <a:bodyPr/>
+          <a:lstStyle/>
+          <a:p>
+            <a:endParaRPr lang="es-ES"/>
+          </a:p>
+        </p:txBody>
       </p:sp>
       <p:sp>
         <p:nvSpPr>
@@ -8729,6 +8721,13 @@
             <a:prstDash val="solid"/>
           </a:ln>
         </p:spPr>
+        <p:txBody>
+          <a:bodyPr/>
+          <a:lstStyle/>
+          <a:p>
+            <a:endParaRPr lang="es-ES"/>
+          </a:p>
+        </p:txBody>
       </p:sp>
       <p:sp>
         <p:nvSpPr>
@@ -8751,7 +8750,7 @@
           <a:bodyPr wrap="square" rtlCol="0" anchor="t"/>
           <a:lstStyle/>
           <a:p>
-            <a:pPr indent="0" marL="0">
+            <a:pPr marL="0" indent="0">
               <a:buNone/>
             </a:pPr>
             <a:r>
@@ -8768,7 +8767,7 @@
             <a:endParaRPr lang="en-US" sz="1700" dirty="0"/>
           </a:p>
           <a:p>
-            <a:pPr indent="0" marL="0">
+            <a:pPr marL="0" indent="0">
               <a:buNone/>
             </a:pPr>
             <a:r>
@@ -8785,7 +8784,7 @@
             <a:endParaRPr lang="en-US" sz="1700" dirty="0"/>
           </a:p>
           <a:p>
-            <a:pPr indent="0" marL="0">
+            <a:pPr marL="0" indent="0">
               <a:buNone/>
             </a:pPr>
             <a:r>
@@ -8802,7 +8801,7 @@
             <a:endParaRPr lang="en-US" sz="1700" dirty="0"/>
           </a:p>
           <a:p>
-            <a:pPr indent="0" marL="0">
+            <a:pPr marL="0" indent="0">
               <a:buNone/>
             </a:pPr>
             <a:r>
@@ -8869,6 +8868,13 @@
             <a:prstDash val="solid"/>
           </a:ln>
         </p:spPr>
+        <p:txBody>
+          <a:bodyPr/>
+          <a:lstStyle/>
+          <a:p>
+            <a:endParaRPr lang="es-ES"/>
+          </a:p>
+        </p:txBody>
       </p:sp>
       <p:sp>
         <p:nvSpPr>
@@ -8891,7 +8897,7 @@
           <a:bodyPr wrap="square" rtlCol="0" anchor="ctr"/>
           <a:lstStyle/>
           <a:p>
-            <a:pPr indent="0" marL="0">
+            <a:pPr marL="0" indent="0">
               <a:buNone/>
             </a:pPr>
             <a:r>
@@ -8930,7 +8936,7 @@
           <a:bodyPr wrap="square" rtlCol="0" anchor="ctr"/>
           <a:lstStyle/>
           <a:p>
-            <a:pPr algn="r" indent="0" marL="0">
+            <a:pPr marL="0" indent="0" algn="r">
               <a:buNone/>
             </a:pPr>
             <a:r>
@@ -8972,6 +8978,13 @@
             <a:prstDash val="solid"/>
           </a:ln>
         </p:spPr>
+        <p:txBody>
+          <a:bodyPr/>
+          <a:lstStyle/>
+          <a:p>
+            <a:endParaRPr lang="es-ES"/>
+          </a:p>
+        </p:txBody>
       </p:sp>
       <p:sp>
         <p:nvSpPr>
@@ -8997,6 +9010,13 @@
             <a:prstDash val="solid"/>
           </a:ln>
         </p:spPr>
+        <p:txBody>
+          <a:bodyPr/>
+          <a:lstStyle/>
+          <a:p>
+            <a:endParaRPr lang="es-ES"/>
+          </a:p>
+        </p:txBody>
       </p:sp>
       <p:sp>
         <p:nvSpPr>
@@ -9019,7 +9039,7 @@
           <a:bodyPr wrap="square" rtlCol="0" anchor="t"/>
           <a:lstStyle/>
           <a:p>
-            <a:pPr indent="0" marL="0">
+            <a:pPr marL="0" indent="0">
               <a:buNone/>
             </a:pPr>
             <a:r>
@@ -9036,7 +9056,7 @@
             <a:endParaRPr lang="en-US" sz="1450" dirty="0"/>
           </a:p>
           <a:p>
-            <a:pPr indent="0" marL="0">
+            <a:pPr marL="0" indent="0">
               <a:buNone/>
             </a:pPr>
             <a:r>
@@ -9053,7 +9073,7 @@
             <a:endParaRPr lang="en-US" sz="1450" dirty="0"/>
           </a:p>
           <a:p>
-            <a:pPr indent="0" marL="0">
+            <a:pPr marL="0" indent="0">
               <a:buNone/>
             </a:pPr>
             <a:r>
@@ -9070,7 +9090,7 @@
             <a:endParaRPr lang="en-US" sz="1450" dirty="0"/>
           </a:p>
           <a:p>
-            <a:pPr indent="0" marL="0">
+            <a:pPr marL="0" indent="0">
               <a:buNone/>
             </a:pPr>
             <a:r>
@@ -9112,6 +9132,13 @@
             <a:prstDash val="solid"/>
           </a:ln>
         </p:spPr>
+        <p:txBody>
+          <a:bodyPr/>
+          <a:lstStyle/>
+          <a:p>
+            <a:endParaRPr lang="es-ES"/>
+          </a:p>
+        </p:txBody>
       </p:sp>
       <p:sp>
         <p:nvSpPr>
@@ -9137,6 +9164,13 @@
             <a:prstDash val="solid"/>
           </a:ln>
         </p:spPr>
+        <p:txBody>
+          <a:bodyPr/>
+          <a:lstStyle/>
+          <a:p>
+            <a:endParaRPr lang="es-ES"/>
+          </a:p>
+        </p:txBody>
       </p:sp>
       <p:sp>
         <p:nvSpPr>
@@ -9159,7 +9193,7 @@
           <a:bodyPr wrap="square" rtlCol="0" anchor="t"/>
           <a:lstStyle/>
           <a:p>
-            <a:pPr indent="0" marL="0">
+            <a:pPr marL="0" indent="0">
               <a:buNone/>
             </a:pPr>
             <a:r>
@@ -9176,7 +9210,7 @@
             <a:endParaRPr lang="en-US" sz="1450" dirty="0"/>
           </a:p>
           <a:p>
-            <a:pPr indent="0" marL="0">
+            <a:pPr marL="0" indent="0">
               <a:buNone/>
             </a:pPr>
             <a:r>
@@ -9193,7 +9227,7 @@
             <a:endParaRPr lang="en-US" sz="1450" dirty="0"/>
           </a:p>
           <a:p>
-            <a:pPr indent="0" marL="0">
+            <a:pPr marL="0" indent="0">
               <a:buNone/>
             </a:pPr>
             <a:r>
@@ -9210,7 +9244,7 @@
             <a:endParaRPr lang="en-US" sz="1450" dirty="0"/>
           </a:p>
           <a:p>
-            <a:pPr indent="0" marL="0">
+            <a:pPr marL="0" indent="0">
               <a:buNone/>
             </a:pPr>
             <a:r>
@@ -9249,7 +9283,7 @@
           <a:bodyPr wrap="square" rtlCol="0" anchor="t"/>
           <a:lstStyle/>
           <a:p>
-            <a:pPr indent="0" marL="0">
+            <a:pPr marL="0" indent="0">
               <a:buNone/>
             </a:pPr>
             <a:r>
@@ -9316,6 +9350,13 @@
             <a:prstDash val="solid"/>
           </a:ln>
         </p:spPr>
+        <p:txBody>
+          <a:bodyPr/>
+          <a:lstStyle/>
+          <a:p>
+            <a:endParaRPr lang="es-ES"/>
+          </a:p>
+        </p:txBody>
       </p:sp>
       <p:sp>
         <p:nvSpPr>
@@ -9338,7 +9379,7 @@
           <a:bodyPr wrap="square" rtlCol="0" anchor="ctr"/>
           <a:lstStyle/>
           <a:p>
-            <a:pPr indent="0" marL="0">
+            <a:pPr marL="0" indent="0">
               <a:buNone/>
             </a:pPr>
             <a:r>
@@ -9377,7 +9418,7 @@
           <a:bodyPr wrap="square" rtlCol="0" anchor="ctr"/>
           <a:lstStyle/>
           <a:p>
-            <a:pPr algn="r" indent="0" marL="0">
+            <a:pPr marL="0" indent="0" algn="r">
               <a:buNone/>
             </a:pPr>
             <a:r>
@@ -9419,6 +9460,13 @@
             <a:prstDash val="solid"/>
           </a:ln>
         </p:spPr>
+        <p:txBody>
+          <a:bodyPr/>
+          <a:lstStyle/>
+          <a:p>
+            <a:endParaRPr lang="es-ES"/>
+          </a:p>
+        </p:txBody>
       </p:sp>
       <p:sp>
         <p:nvSpPr>
@@ -9441,7 +9489,7 @@
           <a:bodyPr wrap="square" rtlCol="0" anchor="t"/>
           <a:lstStyle/>
           <a:p>
-            <a:pPr indent="0" marL="0">
+            <a:pPr marL="0" indent="0">
               <a:buNone/>
             </a:pPr>
             <a:r>
@@ -9459,7 +9507,7 @@
             <a:endParaRPr lang="en-US" sz="1850" dirty="0"/>
           </a:p>
           <a:p>
-            <a:pPr indent="0" marL="0">
+            <a:pPr marL="0" indent="0">
               <a:buNone/>
             </a:pPr>
             <a:r>
@@ -9498,7 +9546,7 @@
           <a:bodyPr wrap="square" rtlCol="0" anchor="t"/>
           <a:lstStyle/>
           <a:p>
-            <a:pPr indent="0" marL="0">
+            <a:pPr marL="0" indent="0">
               <a:buNone/>
             </a:pPr>
             <a:r>
@@ -9565,6 +9613,13 @@
             <a:prstDash val="solid"/>
           </a:ln>
         </p:spPr>
+        <p:txBody>
+          <a:bodyPr/>
+          <a:lstStyle/>
+          <a:p>
+            <a:endParaRPr lang="es-ES"/>
+          </a:p>
+        </p:txBody>
       </p:sp>
       <p:sp>
         <p:nvSpPr>
@@ -9587,7 +9642,7 @@
           <a:bodyPr wrap="square" rtlCol="0" anchor="ctr"/>
           <a:lstStyle/>
           <a:p>
-            <a:pPr indent="0" marL="0">
+            <a:pPr marL="0" indent="0">
               <a:buNone/>
             </a:pPr>
             <a:r>
@@ -9626,7 +9681,7 @@
           <a:bodyPr wrap="square" rtlCol="0" anchor="ctr"/>
           <a:lstStyle/>
           <a:p>
-            <a:pPr algn="r" indent="0" marL="0">
+            <a:pPr marL="0" indent="0" algn="r">
               <a:buNone/>
             </a:pPr>
             <a:r>
@@ -9668,6 +9723,13 @@
             <a:prstDash val="solid"/>
           </a:ln>
         </p:spPr>
+        <p:txBody>
+          <a:bodyPr/>
+          <a:lstStyle/>
+          <a:p>
+            <a:endParaRPr lang="es-ES"/>
+          </a:p>
+        </p:txBody>
       </p:sp>
       <p:sp>
         <p:nvSpPr>
@@ -9690,7 +9752,7 @@
           <a:bodyPr wrap="square" rtlCol="0" anchor="ctr"/>
           <a:lstStyle/>
           <a:p>
-            <a:pPr indent="0" marL="0">
+            <a:pPr marL="0" indent="0">
               <a:buNone/>
             </a:pPr>
             <a:r>
@@ -9757,6 +9819,13 @@
             <a:prstDash val="solid"/>
           </a:ln>
         </p:spPr>
+        <p:txBody>
+          <a:bodyPr/>
+          <a:lstStyle/>
+          <a:p>
+            <a:endParaRPr lang="es-ES"/>
+          </a:p>
+        </p:txBody>
       </p:sp>
       <p:sp>
         <p:nvSpPr>
@@ -9779,7 +9848,7 @@
           <a:bodyPr wrap="square" rtlCol="0" anchor="ctr"/>
           <a:lstStyle/>
           <a:p>
-            <a:pPr indent="0" marL="0">
+            <a:pPr marL="0" indent="0">
               <a:buNone/>
             </a:pPr>
             <a:r>
@@ -9818,7 +9887,7 @@
           <a:bodyPr wrap="square" rtlCol="0" anchor="ctr"/>
           <a:lstStyle/>
           <a:p>
-            <a:pPr algn="r" indent="0" marL="0">
+            <a:pPr marL="0" indent="0" algn="r">
               <a:buNone/>
             </a:pPr>
             <a:r>
@@ -9988,6 +10057,13 @@
             <a:prstDash val="solid"/>
           </a:ln>
         </p:spPr>
+        <p:txBody>
+          <a:bodyPr/>
+          <a:lstStyle/>
+          <a:p>
+            <a:endParaRPr lang="es-ES"/>
+          </a:p>
+        </p:txBody>
       </p:sp>
       <p:sp>
         <p:nvSpPr>
@@ -10010,7 +10086,7 @@
           <a:bodyPr wrap="square" rtlCol="0" anchor="ctr"/>
           <a:lstStyle/>
           <a:p>
-            <a:pPr indent="0" marL="0">
+            <a:pPr marL="0" indent="0">
               <a:buNone/>
             </a:pPr>
             <a:r>
@@ -10049,7 +10125,7 @@
           <a:bodyPr wrap="square" rtlCol="0" anchor="ctr"/>
           <a:lstStyle/>
           <a:p>
-            <a:pPr algn="r" indent="0" marL="0">
+            <a:pPr marL="0" indent="0" algn="r">
               <a:buNone/>
             </a:pPr>
             <a:r>
@@ -10198,6 +10274,13 @@
             <a:prstDash val="solid"/>
           </a:ln>
         </p:spPr>
+        <p:txBody>
+          <a:bodyPr/>
+          <a:lstStyle/>
+          <a:p>
+            <a:endParaRPr lang="es-ES"/>
+          </a:p>
+        </p:txBody>
       </p:sp>
       <p:sp>
         <p:nvSpPr>
@@ -10220,7 +10303,7 @@
           <a:bodyPr wrap="square" rtlCol="0" anchor="ctr"/>
           <a:lstStyle/>
           <a:p>
-            <a:pPr indent="0" marL="0">
+            <a:pPr marL="0" indent="0">
               <a:buNone/>
             </a:pPr>
             <a:r>
@@ -10259,7 +10342,7 @@
           <a:bodyPr wrap="square" rtlCol="0" anchor="ctr"/>
           <a:lstStyle/>
           <a:p>
-            <a:pPr algn="r" indent="0" marL="0">
+            <a:pPr marL="0" indent="0" algn="r">
               <a:buNone/>
             </a:pPr>
             <a:r>
@@ -10301,6 +10384,13 @@
             <a:prstDash val="solid"/>
           </a:ln>
         </p:spPr>
+        <p:txBody>
+          <a:bodyPr/>
+          <a:lstStyle/>
+          <a:p>
+            <a:endParaRPr lang="es-ES"/>
+          </a:p>
+        </p:txBody>
       </p:sp>
       <p:sp>
         <p:nvSpPr>
@@ -10323,7 +10413,7 @@
           <a:bodyPr wrap="square" rtlCol="0" anchor="ctr"/>
           <a:lstStyle/>
           <a:p>
-            <a:pPr indent="0" marL="0">
+            <a:pPr marL="0" indent="0">
               <a:buNone/>
             </a:pPr>
             <a:r>
@@ -10390,6 +10480,13 @@
             <a:prstDash val="solid"/>
           </a:ln>
         </p:spPr>
+        <p:txBody>
+          <a:bodyPr/>
+          <a:lstStyle/>
+          <a:p>
+            <a:endParaRPr lang="es-ES"/>
+          </a:p>
+        </p:txBody>
       </p:sp>
       <p:sp>
         <p:nvSpPr>
@@ -10412,7 +10509,7 @@
           <a:bodyPr wrap="square" rtlCol="0" anchor="ctr"/>
           <a:lstStyle/>
           <a:p>
-            <a:pPr indent="0" marL="0">
+            <a:pPr marL="0" indent="0">
               <a:buNone/>
             </a:pPr>
             <a:r>
@@ -10451,7 +10548,7 @@
           <a:bodyPr wrap="square" rtlCol="0" anchor="ctr"/>
           <a:lstStyle/>
           <a:p>
-            <a:pPr algn="r" indent="0" marL="0">
+            <a:pPr marL="0" indent="0" algn="r">
               <a:buNone/>
             </a:pPr>
             <a:r>
@@ -10485,16 +10582,34 @@
         </p:nvGraphicFramePr>
         <p:xfrm>
           <a:off x="548640" y="1554480"/>
-          <a:ext cx="11091672" cy="914400"/>
+          <a:ext cx="11091671" cy="2743200"/>
         </p:xfrm>
         <a:graphic>
           <a:graphicData uri="http://schemas.openxmlformats.org/drawingml/2006/table">
             <a:tbl>
               <a:tblPr/>
               <a:tblGrid>
-                <a:gridCol w="2218334"/>
-                <a:gridCol w="3882085"/>
-                <a:gridCol w="4991252"/>
+                <a:gridCol w="2218334">
+                  <a:extLst>
+                    <a:ext uri="{9D8B030D-6E8A-4147-A177-3AD203B41FA5}">
+                      <a16:colId xmlns:a16="http://schemas.microsoft.com/office/drawing/2014/main" val="20000"/>
+                    </a:ext>
+                  </a:extLst>
+                </a:gridCol>
+                <a:gridCol w="3882085">
+                  <a:extLst>
+                    <a:ext uri="{9D8B030D-6E8A-4147-A177-3AD203B41FA5}">
+                      <a16:colId xmlns:a16="http://schemas.microsoft.com/office/drawing/2014/main" val="20001"/>
+                    </a:ext>
+                  </a:extLst>
+                </a:gridCol>
+                <a:gridCol w="4991252">
+                  <a:extLst>
+                    <a:ext uri="{9D8B030D-6E8A-4147-A177-3AD203B41FA5}">
+                      <a16:colId xmlns:a16="http://schemas.microsoft.com/office/drawing/2014/main" val="20002"/>
+                    </a:ext>
+                  </a:extLst>
+                </a:gridCol>
               </a:tblGrid>
               <a:tr h="914400">
                 <a:tc>
@@ -10502,7 +10617,7 @@
                     <a:bodyPr/>
                     <a:lstStyle/>
                     <a:p>
-                      <a:pPr algn="ctr" indent="0" marL="0">
+                      <a:pPr marL="0" indent="0" algn="ctr">
                         <a:buNone/>
                       </a:pPr>
                       <a:endParaRPr lang="en-US" sz="1800" dirty="0">
@@ -10512,7 +10627,7 @@
                       </a:endParaRPr>
                     </a:p>
                   </a:txBody>
-                  <a:tcPr marL="91440" marR="91440" marT="45720" marB="45720" anchor="ctr">
+                  <a:tcPr anchor="ctr">
                     <a:lnL w="12700" cap="flat" cmpd="sng" algn="ctr">
                       <a:solidFill>
                         <a:srgbClr val="EEEEEE"/>
@@ -10559,7 +10674,7 @@
                     <a:bodyPr/>
                     <a:lstStyle/>
                     <a:p>
-                      <a:pPr algn="ctr" indent="0" marL="0">
+                      <a:pPr marL="0" indent="0" algn="ctr">
                         <a:buNone/>
                       </a:pPr>
                       <a:r>
@@ -10580,7 +10695,7 @@
                       </a:endParaRPr>
                     </a:p>
                   </a:txBody>
-                  <a:tcPr marL="91440" marR="91440" marT="45720" marB="45720" anchor="ctr">
+                  <a:tcPr anchor="ctr">
                     <a:lnL w="12700" cap="flat" cmpd="sng" algn="ctr">
                       <a:solidFill>
                         <a:srgbClr val="EEEEEE"/>
@@ -10627,7 +10742,7 @@
                     <a:bodyPr/>
                     <a:lstStyle/>
                     <a:p>
-                      <a:pPr algn="ctr" indent="0" marL="0">
+                      <a:pPr marL="0" indent="0" algn="ctr">
                         <a:buNone/>
                       </a:pPr>
                       <a:r>
@@ -10648,7 +10763,7 @@
                       </a:endParaRPr>
                     </a:p>
                   </a:txBody>
-                  <a:tcPr marL="91440" marR="91440" marT="45720" marB="45720" anchor="ctr">
+                  <a:tcPr anchor="ctr">
                     <a:lnL w="12700" cap="flat" cmpd="sng" algn="ctr">
                       <a:solidFill>
                         <a:srgbClr val="EEEEEE"/>
@@ -10690,6 +10805,11 @@
                     </a:solidFill>
                   </a:tcPr>
                 </a:tc>
+                <a:extLst>
+                  <a:ext uri="{0D108BD9-81ED-4DB2-BD59-A6C34878D82A}">
+                    <a16:rowId xmlns:a16="http://schemas.microsoft.com/office/drawing/2014/main" val="10000"/>
+                  </a:ext>
+                </a:extLst>
               </a:tr>
               <a:tr h="914400">
                 <a:tc>
@@ -10697,7 +10817,7 @@
                     <a:bodyPr/>
                     <a:lstStyle/>
                     <a:p>
-                      <a:pPr indent="0" marL="0">
+                      <a:pPr marL="0" indent="0">
                         <a:buNone/>
                       </a:pPr>
                       <a:r>
@@ -10718,7 +10838,7 @@
                       </a:endParaRPr>
                     </a:p>
                   </a:txBody>
-                  <a:tcPr marL="91440" marR="91440" marT="45720" marB="45720" anchor="ctr">
+                  <a:tcPr anchor="ctr">
                     <a:lnL w="12700" cap="flat" cmpd="sng" algn="ctr">
                       <a:solidFill>
                         <a:srgbClr val="EEEEEE"/>
@@ -10765,7 +10885,7 @@
                     <a:bodyPr/>
                     <a:lstStyle/>
                     <a:p>
-                      <a:pPr indent="0" marL="0">
+                      <a:pPr marL="0" indent="0">
                         <a:buNone/>
                       </a:pPr>
                       <a:r>
@@ -10786,7 +10906,7 @@
                       </a:endParaRPr>
                     </a:p>
                   </a:txBody>
-                  <a:tcPr marL="91440" marR="91440" marT="45720" marB="45720" anchor="ctr">
+                  <a:tcPr anchor="ctr">
                     <a:lnL w="12700" cap="flat" cmpd="sng" algn="ctr">
                       <a:solidFill>
                         <a:srgbClr val="EEEEEE"/>
@@ -10833,7 +10953,7 @@
                     <a:bodyPr/>
                     <a:lstStyle/>
                     <a:p>
-                      <a:pPr indent="0" marL="0">
+                      <a:pPr marL="0" indent="0">
                         <a:buNone/>
                       </a:pPr>
                       <a:r>
@@ -10854,7 +10974,7 @@
                       </a:endParaRPr>
                     </a:p>
                   </a:txBody>
-                  <a:tcPr marL="91440" marR="91440" marT="45720" marB="45720" anchor="ctr">
+                  <a:tcPr anchor="ctr">
                     <a:lnL w="12700" cap="flat" cmpd="sng" algn="ctr">
                       <a:solidFill>
                         <a:srgbClr val="EEEEEE"/>
@@ -10896,6 +11016,11 @@
                     </a:solidFill>
                   </a:tcPr>
                 </a:tc>
+                <a:extLst>
+                  <a:ext uri="{0D108BD9-81ED-4DB2-BD59-A6C34878D82A}">
+                    <a16:rowId xmlns:a16="http://schemas.microsoft.com/office/drawing/2014/main" val="10001"/>
+                  </a:ext>
+                </a:extLst>
               </a:tr>
               <a:tr h="914400">
                 <a:tc>
@@ -10903,7 +11028,7 @@
                     <a:bodyPr/>
                     <a:lstStyle/>
                     <a:p>
-                      <a:pPr indent="0" marL="0">
+                      <a:pPr marL="0" indent="0">
                         <a:buNone/>
                       </a:pPr>
                       <a:r>
@@ -10924,7 +11049,7 @@
                       </a:endParaRPr>
                     </a:p>
                   </a:txBody>
-                  <a:tcPr marL="91440" marR="91440" marT="45720" marB="45720" anchor="ctr">
+                  <a:tcPr anchor="ctr">
                     <a:lnL w="12700" cap="flat" cmpd="sng" algn="ctr">
                       <a:solidFill>
                         <a:srgbClr val="EEEEEE"/>
@@ -10971,7 +11096,7 @@
                     <a:bodyPr/>
                     <a:lstStyle/>
                     <a:p>
-                      <a:pPr indent="0" marL="0">
+                      <a:pPr marL="0" indent="0">
                         <a:buNone/>
                       </a:pPr>
                       <a:r>
@@ -10992,7 +11117,7 @@
                       </a:endParaRPr>
                     </a:p>
                   </a:txBody>
-                  <a:tcPr marL="91440" marR="91440" marT="45720" marB="45720" anchor="ctr">
+                  <a:tcPr anchor="ctr">
                     <a:lnL w="12700" cap="flat" cmpd="sng" algn="ctr">
                       <a:solidFill>
                         <a:srgbClr val="EEEEEE"/>
@@ -11039,7 +11164,7 @@
                     <a:bodyPr/>
                     <a:lstStyle/>
                     <a:p>
-                      <a:pPr indent="0" marL="0">
+                      <a:pPr marL="0" indent="0">
                         <a:buNone/>
                       </a:pPr>
                       <a:r>
@@ -11060,7 +11185,7 @@
                       </a:endParaRPr>
                     </a:p>
                   </a:txBody>
-                  <a:tcPr marL="91440" marR="91440" marT="45720" marB="45720" anchor="ctr">
+                  <a:tcPr anchor="ctr">
                     <a:lnL w="12700" cap="flat" cmpd="sng" algn="ctr">
                       <a:solidFill>
                         <a:srgbClr val="EEEEEE"/>
@@ -11102,6 +11227,11 @@
                     </a:solidFill>
                   </a:tcPr>
                 </a:tc>
+                <a:extLst>
+                  <a:ext uri="{0D108BD9-81ED-4DB2-BD59-A6C34878D82A}">
+                    <a16:rowId xmlns:a16="http://schemas.microsoft.com/office/drawing/2014/main" val="10002"/>
+                  </a:ext>
+                </a:extLst>
               </a:tr>
             </a:tbl>
           </a:graphicData>
@@ -11131,6 +11261,13 @@
             <a:prstDash val="solid"/>
           </a:ln>
         </p:spPr>
+        <p:txBody>
+          <a:bodyPr/>
+          <a:lstStyle/>
+          <a:p>
+            <a:endParaRPr lang="es-ES"/>
+          </a:p>
+        </p:txBody>
       </p:sp>
       <p:sp>
         <p:nvSpPr>
@@ -11153,7 +11290,7 @@
           <a:bodyPr wrap="square" rtlCol="0" anchor="ctr"/>
           <a:lstStyle/>
           <a:p>
-            <a:pPr indent="0" marL="0">
+            <a:pPr marL="0" indent="0">
               <a:buNone/>
             </a:pPr>
             <a:r>
@@ -11220,6 +11357,13 @@
             <a:prstDash val="solid"/>
           </a:ln>
         </p:spPr>
+        <p:txBody>
+          <a:bodyPr/>
+          <a:lstStyle/>
+          <a:p>
+            <a:endParaRPr lang="es-ES"/>
+          </a:p>
+        </p:txBody>
       </p:sp>
       <p:sp>
         <p:nvSpPr>
@@ -11242,7 +11386,7 @@
           <a:bodyPr wrap="square" rtlCol="0" anchor="ctr"/>
           <a:lstStyle/>
           <a:p>
-            <a:pPr indent="0" marL="0">
+            <a:pPr marL="0" indent="0">
               <a:buNone/>
             </a:pPr>
             <a:r>
@@ -11281,7 +11425,7 @@
           <a:bodyPr wrap="square" rtlCol="0" anchor="ctr"/>
           <a:lstStyle/>
           <a:p>
-            <a:pPr algn="r" indent="0" marL="0">
+            <a:pPr marL="0" indent="0" algn="r">
               <a:buNone/>
             </a:pPr>
             <a:r>
@@ -11323,6 +11467,13 @@
             <a:prstDash val="solid"/>
           </a:ln>
         </p:spPr>
+        <p:txBody>
+          <a:bodyPr/>
+          <a:lstStyle/>
+          <a:p>
+            <a:endParaRPr lang="es-ES"/>
+          </a:p>
+        </p:txBody>
       </p:sp>
       <p:sp>
         <p:nvSpPr>
@@ -11345,7 +11496,7 @@
           <a:bodyPr wrap="square" rtlCol="0" anchor="ctr"/>
           <a:lstStyle/>
           <a:p>
-            <a:pPr indent="0" marL="0">
+            <a:pPr marL="0" indent="0">
               <a:buNone/>
             </a:pPr>
             <a:r>
@@ -11384,7 +11535,7 @@
           <a:bodyPr wrap="square" rtlCol="0" anchor="t"/>
           <a:lstStyle/>
           <a:p>
-            <a:pPr indent="0" marL="0">
+            <a:pPr marL="0" indent="0">
               <a:buNone/>
             </a:pPr>
             <a:r>
@@ -11451,6 +11602,13 @@
             <a:prstDash val="solid"/>
           </a:ln>
         </p:spPr>
+        <p:txBody>
+          <a:bodyPr/>
+          <a:lstStyle/>
+          <a:p>
+            <a:endParaRPr lang="es-ES"/>
+          </a:p>
+        </p:txBody>
       </p:sp>
       <p:sp>
         <p:nvSpPr>
@@ -11473,7 +11631,7 @@
           <a:bodyPr wrap="square" rtlCol="0" anchor="ctr"/>
           <a:lstStyle/>
           <a:p>
-            <a:pPr indent="0" marL="0">
+            <a:pPr marL="0" indent="0">
               <a:buNone/>
             </a:pPr>
             <a:r>
@@ -11512,7 +11670,7 @@
           <a:bodyPr wrap="square" rtlCol="0" anchor="ctr"/>
           <a:lstStyle/>
           <a:p>
-            <a:pPr algn="r" indent="0" marL="0">
+            <a:pPr marL="0" indent="0" algn="r">
               <a:buNone/>
             </a:pPr>
             <a:r>
@@ -11551,7 +11709,7 @@
           <a:bodyPr wrap="square" rtlCol="0" anchor="t"/>
           <a:lstStyle/>
           <a:p>
-            <a:pPr indent="0" marL="0">
+            <a:pPr marL="0" indent="0">
               <a:buNone/>
             </a:pPr>
             <a:r>
@@ -11585,17 +11743,41 @@
         </p:nvGraphicFramePr>
         <p:xfrm>
           <a:off x="548640" y="2468880"/>
-          <a:ext cx="11091672" cy="914400"/>
+          <a:ext cx="11091671" cy="2194560"/>
         </p:xfrm>
         <a:graphic>
           <a:graphicData uri="http://schemas.openxmlformats.org/drawingml/2006/table">
             <a:tbl>
               <a:tblPr/>
               <a:tblGrid>
-                <a:gridCol w="1441917"/>
-                <a:gridCol w="2440168"/>
-                <a:gridCol w="2994751"/>
-                <a:gridCol w="4214835"/>
+                <a:gridCol w="1441917">
+                  <a:extLst>
+                    <a:ext uri="{9D8B030D-6E8A-4147-A177-3AD203B41FA5}">
+                      <a16:colId xmlns:a16="http://schemas.microsoft.com/office/drawing/2014/main" val="20000"/>
+                    </a:ext>
+                  </a:extLst>
+                </a:gridCol>
+                <a:gridCol w="2440168">
+                  <a:extLst>
+                    <a:ext uri="{9D8B030D-6E8A-4147-A177-3AD203B41FA5}">
+                      <a16:colId xmlns:a16="http://schemas.microsoft.com/office/drawing/2014/main" val="20001"/>
+                    </a:ext>
+                  </a:extLst>
+                </a:gridCol>
+                <a:gridCol w="2994751">
+                  <a:extLst>
+                    <a:ext uri="{9D8B030D-6E8A-4147-A177-3AD203B41FA5}">
+                      <a16:colId xmlns:a16="http://schemas.microsoft.com/office/drawing/2014/main" val="20002"/>
+                    </a:ext>
+                  </a:extLst>
+                </a:gridCol>
+                <a:gridCol w="4214835">
+                  <a:extLst>
+                    <a:ext uri="{9D8B030D-6E8A-4147-A177-3AD203B41FA5}">
+                      <a16:colId xmlns:a16="http://schemas.microsoft.com/office/drawing/2014/main" val="20003"/>
+                    </a:ext>
+                  </a:extLst>
+                </a:gridCol>
               </a:tblGrid>
               <a:tr h="731520">
                 <a:tc>
@@ -11603,7 +11785,7 @@
                     <a:bodyPr/>
                     <a:lstStyle/>
                     <a:p>
-                      <a:pPr algn="ctr" indent="0" marL="0">
+                      <a:pPr marL="0" indent="0" algn="ctr">
                         <a:buNone/>
                       </a:pPr>
                       <a:r>
@@ -11624,7 +11806,7 @@
                       </a:endParaRPr>
                     </a:p>
                   </a:txBody>
-                  <a:tcPr marL="91440" marR="91440" marT="45720" marB="45720" anchor="ctr">
+                  <a:tcPr anchor="ctr">
                     <a:lnL w="12700" cap="flat" cmpd="sng" algn="ctr">
                       <a:solidFill>
                         <a:srgbClr val="EEEEEE"/>
@@ -11671,7 +11853,7 @@
                     <a:bodyPr/>
                     <a:lstStyle/>
                     <a:p>
-                      <a:pPr algn="ctr" indent="0" marL="0">
+                      <a:pPr marL="0" indent="0" algn="ctr">
                         <a:buNone/>
                       </a:pPr>
                       <a:r>
@@ -11692,7 +11874,7 @@
                       </a:endParaRPr>
                     </a:p>
                   </a:txBody>
-                  <a:tcPr marL="91440" marR="91440" marT="45720" marB="45720" anchor="ctr">
+                  <a:tcPr anchor="ctr">
                     <a:lnL w="12700" cap="flat" cmpd="sng" algn="ctr">
                       <a:solidFill>
                         <a:srgbClr val="EEEEEE"/>
@@ -11739,7 +11921,7 @@
                     <a:bodyPr/>
                     <a:lstStyle/>
                     <a:p>
-                      <a:pPr algn="ctr" indent="0" marL="0">
+                      <a:pPr marL="0" indent="0" algn="ctr">
                         <a:buNone/>
                       </a:pPr>
                       <a:r>
@@ -11760,7 +11942,7 @@
                       </a:endParaRPr>
                     </a:p>
                   </a:txBody>
-                  <a:tcPr marL="91440" marR="91440" marT="45720" marB="45720" anchor="ctr">
+                  <a:tcPr anchor="ctr">
                     <a:lnL w="12700" cap="flat" cmpd="sng" algn="ctr">
                       <a:solidFill>
                         <a:srgbClr val="EEEEEE"/>
@@ -11807,7 +11989,7 @@
                     <a:bodyPr/>
                     <a:lstStyle/>
                     <a:p>
-                      <a:pPr algn="ctr" indent="0" marL="0">
+                      <a:pPr marL="0" indent="0" algn="ctr">
                         <a:buNone/>
                       </a:pPr>
                       <a:r>
@@ -11828,7 +12010,7 @@
                       </a:endParaRPr>
                     </a:p>
                   </a:txBody>
-                  <a:tcPr marL="91440" marR="91440" marT="45720" marB="45720" anchor="ctr">
+                  <a:tcPr anchor="ctr">
                     <a:lnL w="12700" cap="flat" cmpd="sng" algn="ctr">
                       <a:solidFill>
                         <a:srgbClr val="EEEEEE"/>
@@ -11870,6 +12052,11 @@
                     </a:solidFill>
                   </a:tcPr>
                 </a:tc>
+                <a:extLst>
+                  <a:ext uri="{0D108BD9-81ED-4DB2-BD59-A6C34878D82A}">
+                    <a16:rowId xmlns:a16="http://schemas.microsoft.com/office/drawing/2014/main" val="10000"/>
+                  </a:ext>
+                </a:extLst>
               </a:tr>
               <a:tr h="731520">
                 <a:tc>
@@ -11877,7 +12064,7 @@
                     <a:bodyPr/>
                     <a:lstStyle/>
                     <a:p>
-                      <a:pPr indent="0" marL="0">
+                      <a:pPr marL="0" indent="0">
                         <a:buNone/>
                       </a:pPr>
                       <a:r>
@@ -11898,7 +12085,7 @@
                       </a:endParaRPr>
                     </a:p>
                   </a:txBody>
-                  <a:tcPr marL="91440" marR="91440" marT="45720" marB="45720" anchor="ctr">
+                  <a:tcPr anchor="ctr">
                     <a:lnL w="12700" cap="flat" cmpd="sng" algn="ctr">
                       <a:solidFill>
                         <a:srgbClr val="EEEEEE"/>
@@ -11945,7 +12132,7 @@
                     <a:bodyPr/>
                     <a:lstStyle/>
                     <a:p>
-                      <a:pPr indent="0" marL="0">
+                      <a:pPr marL="0" indent="0">
                         <a:buNone/>
                       </a:pPr>
                       <a:r>
@@ -11966,7 +12153,7 @@
                       </a:endParaRPr>
                     </a:p>
                   </a:txBody>
-                  <a:tcPr marL="91440" marR="91440" marT="45720" marB="45720" anchor="ctr">
+                  <a:tcPr anchor="ctr">
                     <a:lnL w="12700" cap="flat" cmpd="sng" algn="ctr">
                       <a:solidFill>
                         <a:srgbClr val="EEEEEE"/>
@@ -12013,7 +12200,7 @@
                     <a:bodyPr/>
                     <a:lstStyle/>
                     <a:p>
-                      <a:pPr indent="0" marL="0">
+                      <a:pPr marL="0" indent="0">
                         <a:buNone/>
                       </a:pPr>
                       <a:r>
@@ -12034,7 +12221,7 @@
                       </a:endParaRPr>
                     </a:p>
                   </a:txBody>
-                  <a:tcPr marL="91440" marR="91440" marT="45720" marB="45720" anchor="ctr">
+                  <a:tcPr anchor="ctr">
                     <a:lnL w="12700" cap="flat" cmpd="sng" algn="ctr">
                       <a:solidFill>
                         <a:srgbClr val="EEEEEE"/>
@@ -12081,7 +12268,7 @@
                     <a:bodyPr/>
                     <a:lstStyle/>
                     <a:p>
-                      <a:pPr indent="0" marL="0">
+                      <a:pPr marL="0" indent="0">
                         <a:buNone/>
                       </a:pPr>
                       <a:r>
@@ -12102,7 +12289,7 @@
                       </a:endParaRPr>
                     </a:p>
                   </a:txBody>
-                  <a:tcPr marL="91440" marR="91440" marT="45720" marB="45720" anchor="ctr">
+                  <a:tcPr anchor="ctr">
                     <a:lnL w="12700" cap="flat" cmpd="sng" algn="ctr">
                       <a:solidFill>
                         <a:srgbClr val="EEEEEE"/>
@@ -12144,6 +12331,11 @@
                     </a:solidFill>
                   </a:tcPr>
                 </a:tc>
+                <a:extLst>
+                  <a:ext uri="{0D108BD9-81ED-4DB2-BD59-A6C34878D82A}">
+                    <a16:rowId xmlns:a16="http://schemas.microsoft.com/office/drawing/2014/main" val="10001"/>
+                  </a:ext>
+                </a:extLst>
               </a:tr>
               <a:tr h="731520">
                 <a:tc>
@@ -12151,7 +12343,7 @@
                     <a:bodyPr/>
                     <a:lstStyle/>
                     <a:p>
-                      <a:pPr indent="0" marL="0">
+                      <a:pPr marL="0" indent="0">
                         <a:buNone/>
                       </a:pPr>
                       <a:r>
@@ -12172,7 +12364,7 @@
                       </a:endParaRPr>
                     </a:p>
                   </a:txBody>
-                  <a:tcPr marL="91440" marR="91440" marT="45720" marB="45720" anchor="ctr">
+                  <a:tcPr anchor="ctr">
                     <a:lnL w="12700" cap="flat" cmpd="sng" algn="ctr">
                       <a:solidFill>
                         <a:srgbClr val="EEEEEE"/>
@@ -12219,7 +12411,7 @@
                     <a:bodyPr/>
                     <a:lstStyle/>
                     <a:p>
-                      <a:pPr indent="0" marL="0">
+                      <a:pPr marL="0" indent="0">
                         <a:buNone/>
                       </a:pPr>
                       <a:r>
@@ -12240,7 +12432,7 @@
                       </a:endParaRPr>
                     </a:p>
                   </a:txBody>
-                  <a:tcPr marL="91440" marR="91440" marT="45720" marB="45720" anchor="ctr">
+                  <a:tcPr anchor="ctr">
                     <a:lnL w="12700" cap="flat" cmpd="sng" algn="ctr">
                       <a:solidFill>
                         <a:srgbClr val="EEEEEE"/>
@@ -12287,7 +12479,7 @@
                     <a:bodyPr/>
                     <a:lstStyle/>
                     <a:p>
-                      <a:pPr indent="0" marL="0">
+                      <a:pPr marL="0" indent="0">
                         <a:buNone/>
                       </a:pPr>
                       <a:r>
@@ -12308,7 +12500,7 @@
                       </a:endParaRPr>
                     </a:p>
                   </a:txBody>
-                  <a:tcPr marL="91440" marR="91440" marT="45720" marB="45720" anchor="ctr">
+                  <a:tcPr anchor="ctr">
                     <a:lnL w="12700" cap="flat" cmpd="sng" algn="ctr">
                       <a:solidFill>
                         <a:srgbClr val="EEEEEE"/>
@@ -12355,7 +12547,7 @@
                     <a:bodyPr/>
                     <a:lstStyle/>
                     <a:p>
-                      <a:pPr indent="0" marL="0">
+                      <a:pPr marL="0" indent="0">
                         <a:buNone/>
                       </a:pPr>
                       <a:r>
@@ -12376,7 +12568,7 @@
                       </a:endParaRPr>
                     </a:p>
                   </a:txBody>
-                  <a:tcPr marL="91440" marR="91440" marT="45720" marB="45720" anchor="ctr">
+                  <a:tcPr anchor="ctr">
                     <a:lnL w="12700" cap="flat" cmpd="sng" algn="ctr">
                       <a:solidFill>
                         <a:srgbClr val="EEEEEE"/>
@@ -12418,6 +12610,11 @@
                     </a:solidFill>
                   </a:tcPr>
                 </a:tc>
+                <a:extLst>
+                  <a:ext uri="{0D108BD9-81ED-4DB2-BD59-A6C34878D82A}">
+                    <a16:rowId xmlns:a16="http://schemas.microsoft.com/office/drawing/2014/main" val="10002"/>
+                  </a:ext>
+                </a:extLst>
               </a:tr>
             </a:tbl>
           </a:graphicData>
@@ -12425,7 +12622,7 @@
       </p:graphicFrame>
       <p:sp>
         <p:nvSpPr>
-          <p:cNvPr id="7" name="Text 4"/>
+          <p:cNvPr id="6" name="Text 4"/>
           <p:cNvSpPr/>
           <p:nvPr/>
         </p:nvSpPr>
@@ -12444,7 +12641,7 @@
           <a:bodyPr wrap="square" rtlCol="0" anchor="t"/>
           <a:lstStyle/>
           <a:p>
-            <a:pPr indent="0" marL="0">
+            <a:pPr marL="0" indent="0">
               <a:buNone/>
             </a:pPr>
             <a:r>
@@ -12511,6 +12708,13 @@
             <a:prstDash val="solid"/>
           </a:ln>
         </p:spPr>
+        <p:txBody>
+          <a:bodyPr/>
+          <a:lstStyle/>
+          <a:p>
+            <a:endParaRPr lang="es-ES"/>
+          </a:p>
+        </p:txBody>
       </p:sp>
       <p:sp>
         <p:nvSpPr>
@@ -12533,7 +12737,7 @@
           <a:bodyPr wrap="square" rtlCol="0" anchor="ctr"/>
           <a:lstStyle/>
           <a:p>
-            <a:pPr indent="0" marL="0">
+            <a:pPr marL="0" indent="0">
               <a:buNone/>
             </a:pPr>
             <a:r>
@@ -12572,7 +12776,7 @@
           <a:bodyPr wrap="square" rtlCol="0" anchor="ctr"/>
           <a:lstStyle/>
           <a:p>
-            <a:pPr algn="r" indent="0" marL="0">
+            <a:pPr marL="0" indent="0" algn="r">
               <a:buNone/>
             </a:pPr>
             <a:r>
@@ -12611,7 +12815,7 @@
           <a:bodyPr wrap="square" rtlCol="0" anchor="t"/>
           <a:lstStyle/>
           <a:p>
-            <a:pPr indent="0" marL="0">
+            <a:pPr marL="0" indent="0">
               <a:buNone/>
             </a:pPr>
             <a:r>
@@ -12653,6 +12857,13 @@
             <a:prstDash val="solid"/>
           </a:ln>
         </p:spPr>
+        <p:txBody>
+          <a:bodyPr/>
+          <a:lstStyle/>
+          <a:p>
+            <a:endParaRPr lang="es-ES"/>
+          </a:p>
+        </p:txBody>
       </p:sp>
       <p:sp>
         <p:nvSpPr>
@@ -12675,7 +12886,7 @@
           <a:bodyPr wrap="square" rtlCol="0" anchor="ctr"/>
           <a:lstStyle/>
           <a:p>
-            <a:pPr indent="0" marL="0">
+            <a:pPr marL="0" indent="0">
               <a:buNone/>
             </a:pPr>
             <a:r>
@@ -12742,6 +12953,13 @@
             <a:prstDash val="solid"/>
           </a:ln>
         </p:spPr>
+        <p:txBody>
+          <a:bodyPr/>
+          <a:lstStyle/>
+          <a:p>
+            <a:endParaRPr lang="es-ES"/>
+          </a:p>
+        </p:txBody>
       </p:sp>
       <p:sp>
         <p:nvSpPr>
@@ -12764,7 +12982,7 @@
           <a:bodyPr wrap="square" rtlCol="0" anchor="ctr"/>
           <a:lstStyle/>
           <a:p>
-            <a:pPr indent="0" marL="0">
+            <a:pPr marL="0" indent="0">
               <a:buNone/>
             </a:pPr>
             <a:r>
@@ -12803,7 +13021,7 @@
           <a:bodyPr wrap="square" rtlCol="0" anchor="ctr"/>
           <a:lstStyle/>
           <a:p>
-            <a:pPr algn="r" indent="0" marL="0">
+            <a:pPr marL="0" indent="0" algn="r">
               <a:buNone/>
             </a:pPr>
             <a:r>
@@ -12842,7 +13060,7 @@
           <a:bodyPr wrap="square" rtlCol="0" anchor="t"/>
           <a:lstStyle/>
           <a:p>
-            <a:pPr indent="0" marL="0">
+            <a:pPr marL="0" indent="0">
               <a:buNone/>
             </a:pPr>
             <a:r>
@@ -12876,15 +13094,27 @@
         </p:nvGraphicFramePr>
         <p:xfrm>
           <a:off x="548640" y="2606040"/>
-          <a:ext cx="11091672" cy="914400"/>
+          <a:ext cx="11091672" cy="2267712"/>
         </p:xfrm>
         <a:graphic>
           <a:graphicData uri="http://schemas.openxmlformats.org/drawingml/2006/table">
             <a:tbl>
               <a:tblPr/>
               <a:tblGrid>
-                <a:gridCol w="4436669"/>
-                <a:gridCol w="6655003"/>
+                <a:gridCol w="4436669">
+                  <a:extLst>
+                    <a:ext uri="{9D8B030D-6E8A-4147-A177-3AD203B41FA5}">
+                      <a16:colId xmlns:a16="http://schemas.microsoft.com/office/drawing/2014/main" val="20000"/>
+                    </a:ext>
+                  </a:extLst>
+                </a:gridCol>
+                <a:gridCol w="6655003">
+                  <a:extLst>
+                    <a:ext uri="{9D8B030D-6E8A-4147-A177-3AD203B41FA5}">
+                      <a16:colId xmlns:a16="http://schemas.microsoft.com/office/drawing/2014/main" val="20001"/>
+                    </a:ext>
+                  </a:extLst>
+                </a:gridCol>
               </a:tblGrid>
               <a:tr h="566928">
                 <a:tc>
@@ -12892,7 +13122,7 @@
                     <a:bodyPr/>
                     <a:lstStyle/>
                     <a:p>
-                      <a:pPr algn="ctr" indent="0" marL="0">
+                      <a:pPr marL="0" indent="0" algn="ctr">
                         <a:buNone/>
                       </a:pPr>
                       <a:r>
@@ -12913,7 +13143,7 @@
                       </a:endParaRPr>
                     </a:p>
                   </a:txBody>
-                  <a:tcPr marL="91440" marR="91440" marT="45720" marB="45720" anchor="ctr">
+                  <a:tcPr anchor="ctr">
                     <a:lnL w="12700" cap="flat" cmpd="sng" algn="ctr">
                       <a:solidFill>
                         <a:srgbClr val="EEEEEE"/>
@@ -12960,7 +13190,7 @@
                     <a:bodyPr/>
                     <a:lstStyle/>
                     <a:p>
-                      <a:pPr algn="ctr" indent="0" marL="0">
+                      <a:pPr marL="0" indent="0" algn="ctr">
                         <a:buNone/>
                       </a:pPr>
                       <a:r>
@@ -12981,7 +13211,7 @@
                       </a:endParaRPr>
                     </a:p>
                   </a:txBody>
-                  <a:tcPr marL="91440" marR="91440" marT="45720" marB="45720" anchor="ctr">
+                  <a:tcPr anchor="ctr">
                     <a:lnL w="12700" cap="flat" cmpd="sng" algn="ctr">
                       <a:solidFill>
                         <a:srgbClr val="EEEEEE"/>
@@ -13023,6 +13253,11 @@
                     </a:solidFill>
                   </a:tcPr>
                 </a:tc>
+                <a:extLst>
+                  <a:ext uri="{0D108BD9-81ED-4DB2-BD59-A6C34878D82A}">
+                    <a16:rowId xmlns:a16="http://schemas.microsoft.com/office/drawing/2014/main" val="10000"/>
+                  </a:ext>
+                </a:extLst>
               </a:tr>
               <a:tr h="566928">
                 <a:tc>
@@ -13030,7 +13265,7 @@
                     <a:bodyPr/>
                     <a:lstStyle/>
                     <a:p>
-                      <a:pPr indent="0" marL="0">
+                      <a:pPr marL="0" indent="0">
                         <a:buNone/>
                       </a:pPr>
                       <a:r>
@@ -13051,7 +13286,7 @@
                       </a:endParaRPr>
                     </a:p>
                   </a:txBody>
-                  <a:tcPr marL="91440" marR="91440" marT="45720" marB="45720" anchor="ctr">
+                  <a:tcPr anchor="ctr">
                     <a:lnL w="12700" cap="flat" cmpd="sng" algn="ctr">
                       <a:solidFill>
                         <a:srgbClr val="EEEEEE"/>
@@ -13098,7 +13333,7 @@
                     <a:bodyPr/>
                     <a:lstStyle/>
                     <a:p>
-                      <a:pPr indent="0" marL="0">
+                      <a:pPr marL="0" indent="0">
                         <a:buNone/>
                       </a:pPr>
                       <a:r>
@@ -13119,7 +13354,7 @@
                       </a:endParaRPr>
                     </a:p>
                   </a:txBody>
-                  <a:tcPr marL="91440" marR="91440" marT="45720" marB="45720" anchor="ctr">
+                  <a:tcPr anchor="ctr">
                     <a:lnL w="12700" cap="flat" cmpd="sng" algn="ctr">
                       <a:solidFill>
                         <a:srgbClr val="EEEEEE"/>
@@ -13161,6 +13396,11 @@
                     </a:solidFill>
                   </a:tcPr>
                 </a:tc>
+                <a:extLst>
+                  <a:ext uri="{0D108BD9-81ED-4DB2-BD59-A6C34878D82A}">
+                    <a16:rowId xmlns:a16="http://schemas.microsoft.com/office/drawing/2014/main" val="10001"/>
+                  </a:ext>
+                </a:extLst>
               </a:tr>
               <a:tr h="566928">
                 <a:tc>
@@ -13168,7 +13408,7 @@
                     <a:bodyPr/>
                     <a:lstStyle/>
                     <a:p>
-                      <a:pPr indent="0" marL="0">
+                      <a:pPr marL="0" indent="0">
                         <a:buNone/>
                       </a:pPr>
                       <a:r>
@@ -13189,7 +13429,7 @@
                       </a:endParaRPr>
                     </a:p>
                   </a:txBody>
-                  <a:tcPr marL="91440" marR="91440" marT="45720" marB="45720" anchor="ctr">
+                  <a:tcPr anchor="ctr">
                     <a:lnL w="12700" cap="flat" cmpd="sng" algn="ctr">
                       <a:solidFill>
                         <a:srgbClr val="EEEEEE"/>
@@ -13236,7 +13476,7 @@
                     <a:bodyPr/>
                     <a:lstStyle/>
                     <a:p>
-                      <a:pPr indent="0" marL="0">
+                      <a:pPr marL="0" indent="0">
                         <a:buNone/>
                       </a:pPr>
                       <a:r>
@@ -13257,7 +13497,7 @@
                       </a:endParaRPr>
                     </a:p>
                   </a:txBody>
-                  <a:tcPr marL="91440" marR="91440" marT="45720" marB="45720" anchor="ctr">
+                  <a:tcPr anchor="ctr">
                     <a:lnL w="12700" cap="flat" cmpd="sng" algn="ctr">
                       <a:solidFill>
                         <a:srgbClr val="EEEEEE"/>
@@ -13299,6 +13539,11 @@
                     </a:solidFill>
                   </a:tcPr>
                 </a:tc>
+                <a:extLst>
+                  <a:ext uri="{0D108BD9-81ED-4DB2-BD59-A6C34878D82A}">
+                    <a16:rowId xmlns:a16="http://schemas.microsoft.com/office/drawing/2014/main" val="10002"/>
+                  </a:ext>
+                </a:extLst>
               </a:tr>
               <a:tr h="566928">
                 <a:tc>
@@ -13306,7 +13551,7 @@
                     <a:bodyPr/>
                     <a:lstStyle/>
                     <a:p>
-                      <a:pPr indent="0" marL="0">
+                      <a:pPr marL="0" indent="0">
                         <a:buNone/>
                       </a:pPr>
                       <a:r>
@@ -13327,7 +13572,7 @@
                       </a:endParaRPr>
                     </a:p>
                   </a:txBody>
-                  <a:tcPr marL="91440" marR="91440" marT="45720" marB="45720" anchor="ctr">
+                  <a:tcPr anchor="ctr">
                     <a:lnL w="12700" cap="flat" cmpd="sng" algn="ctr">
                       <a:solidFill>
                         <a:srgbClr val="EEEEEE"/>
@@ -13374,7 +13619,7 @@
                     <a:bodyPr/>
                     <a:lstStyle/>
                     <a:p>
-                      <a:pPr indent="0" marL="0">
+                      <a:pPr marL="0" indent="0">
                         <a:buNone/>
                       </a:pPr>
                       <a:r>
@@ -13395,7 +13640,7 @@
                       </a:endParaRPr>
                     </a:p>
                   </a:txBody>
-                  <a:tcPr marL="91440" marR="91440" marT="45720" marB="45720" anchor="ctr">
+                  <a:tcPr anchor="ctr">
                     <a:lnL w="12700" cap="flat" cmpd="sng" algn="ctr">
                       <a:solidFill>
                         <a:srgbClr val="EEEEEE"/>
@@ -13437,6 +13682,11 @@
                     </a:solidFill>
                   </a:tcPr>
                 </a:tc>
+                <a:extLst>
+                  <a:ext uri="{0D108BD9-81ED-4DB2-BD59-A6C34878D82A}">
+                    <a16:rowId xmlns:a16="http://schemas.microsoft.com/office/drawing/2014/main" val="10003"/>
+                  </a:ext>
+                </a:extLst>
               </a:tr>
             </a:tbl>
           </a:graphicData>
@@ -13463,7 +13713,7 @@
           <a:bodyPr wrap="square" rtlCol="0" anchor="t"/>
           <a:lstStyle/>
           <a:p>
-            <a:pPr indent="0" marL="0">
+            <a:pPr marL="0" indent="0">
               <a:buNone/>
             </a:pPr>
             <a:r>
@@ -13530,6 +13780,13 @@
             <a:prstDash val="solid"/>
           </a:ln>
         </p:spPr>
+        <p:txBody>
+          <a:bodyPr/>
+          <a:lstStyle/>
+          <a:p>
+            <a:endParaRPr lang="es-ES"/>
+          </a:p>
+        </p:txBody>
       </p:sp>
       <p:sp>
         <p:nvSpPr>
@@ -13552,7 +13809,7 @@
           <a:bodyPr wrap="square" rtlCol="0" anchor="ctr"/>
           <a:lstStyle/>
           <a:p>
-            <a:pPr indent="0" marL="0">
+            <a:pPr marL="0" indent="0">
               <a:buNone/>
             </a:pPr>
             <a:r>
@@ -13591,7 +13848,7 @@
           <a:bodyPr wrap="square" rtlCol="0" anchor="ctr"/>
           <a:lstStyle/>
           <a:p>
-            <a:pPr algn="r" indent="0" marL="0">
+            <a:pPr marL="0" indent="0" algn="r">
               <a:buNone/>
             </a:pPr>
             <a:r>
@@ -13633,6 +13890,13 @@
             <a:prstDash val="solid"/>
           </a:ln>
         </p:spPr>
+        <p:txBody>
+          <a:bodyPr/>
+          <a:lstStyle/>
+          <a:p>
+            <a:endParaRPr lang="es-ES"/>
+          </a:p>
+        </p:txBody>
       </p:sp>
       <p:sp>
         <p:nvSpPr>
@@ -13658,6 +13922,13 @@
             <a:prstDash val="solid"/>
           </a:ln>
         </p:spPr>
+        <p:txBody>
+          <a:bodyPr/>
+          <a:lstStyle/>
+          <a:p>
+            <a:endParaRPr lang="es-ES"/>
+          </a:p>
+        </p:txBody>
       </p:sp>
       <p:sp>
         <p:nvSpPr>
@@ -13680,7 +13951,7 @@
           <a:bodyPr wrap="square" rtlCol="0" anchor="t"/>
           <a:lstStyle/>
           <a:p>
-            <a:pPr indent="0" marL="0">
+            <a:pPr marL="0" indent="0">
               <a:buNone/>
             </a:pPr>
             <a:r>
@@ -13697,7 +13968,7 @@
             <a:endParaRPr lang="en-US" sz="1300" dirty="0"/>
           </a:p>
           <a:p>
-            <a:pPr indent="0" marL="0">
+            <a:pPr marL="0" indent="0">
               <a:buNone/>
             </a:pPr>
             <a:r>
@@ -13714,7 +13985,7 @@
             <a:endParaRPr lang="en-US" sz="1300" dirty="0"/>
           </a:p>
           <a:p>
-            <a:pPr indent="0" marL="0">
+            <a:pPr marL="0" indent="0">
               <a:buNone/>
             </a:pPr>
             <a:r>
@@ -13731,13 +14002,13 @@
             <a:endParaRPr lang="en-US" sz="1300" dirty="0"/>
           </a:p>
           <a:p>
-            <a:pPr indent="0" marL="0">
+            <a:pPr marL="0" indent="0">
               <a:buNone/>
             </a:pPr>
             <a:endParaRPr lang="en-US" sz="1300" dirty="0"/>
           </a:p>
           <a:p>
-            <a:pPr indent="0" marL="0">
+            <a:pPr marL="0" indent="0">
               <a:buNone/>
             </a:pPr>
             <a:r>
@@ -13754,7 +14025,7 @@
             <a:endParaRPr lang="en-US" sz="1300" dirty="0"/>
           </a:p>
           <a:p>
-            <a:pPr indent="0" marL="0">
+            <a:pPr marL="0" indent="0">
               <a:buNone/>
             </a:pPr>
             <a:r>
@@ -13771,7 +14042,7 @@
             <a:endParaRPr lang="en-US" sz="1300" dirty="0"/>
           </a:p>
           <a:p>
-            <a:pPr indent="0" marL="0">
+            <a:pPr marL="0" indent="0">
               <a:buNone/>
             </a:pPr>
             <a:r>
@@ -13788,13 +14059,13 @@
             <a:endParaRPr lang="en-US" sz="1300" dirty="0"/>
           </a:p>
           <a:p>
-            <a:pPr indent="0" marL="0">
+            <a:pPr marL="0" indent="0">
               <a:buNone/>
             </a:pPr>
             <a:endParaRPr lang="en-US" sz="1300" dirty="0"/>
           </a:p>
           <a:p>
-            <a:pPr indent="0" marL="0">
+            <a:pPr marL="0" indent="0">
               <a:buNone/>
             </a:pPr>
             <a:r>
@@ -13811,7 +14082,7 @@
             <a:endParaRPr lang="en-US" sz="1300" dirty="0"/>
           </a:p>
           <a:p>
-            <a:pPr indent="0" marL="0">
+            <a:pPr marL="0" indent="0">
               <a:buNone/>
             </a:pPr>
             <a:r>
@@ -13828,13 +14099,13 @@
             <a:endParaRPr lang="en-US" sz="1300" dirty="0"/>
           </a:p>
           <a:p>
-            <a:pPr indent="0" marL="0">
+            <a:pPr marL="0" indent="0">
               <a:buNone/>
             </a:pPr>
             <a:endParaRPr lang="en-US" sz="1300" dirty="0"/>
           </a:p>
           <a:p>
-            <a:pPr indent="0" marL="0">
+            <a:pPr marL="0" indent="0">
               <a:buNone/>
             </a:pPr>
             <a:r>
@@ -13851,7 +14122,7 @@
             <a:endParaRPr lang="en-US" sz="1300" dirty="0"/>
           </a:p>
           <a:p>
-            <a:pPr indent="0" marL="0">
+            <a:pPr marL="0" indent="0">
               <a:buNone/>
             </a:pPr>
             <a:r>
@@ -13868,13 +14139,13 @@
             <a:endParaRPr lang="en-US" sz="1300" dirty="0"/>
           </a:p>
           <a:p>
-            <a:pPr indent="0" marL="0">
+            <a:pPr marL="0" indent="0">
               <a:buNone/>
             </a:pPr>
             <a:endParaRPr lang="en-US" sz="1300" dirty="0"/>
           </a:p>
           <a:p>
-            <a:pPr indent="0" marL="0">
+            <a:pPr marL="0" indent="0">
               <a:buNone/>
             </a:pPr>
             <a:r>
@@ -13891,7 +14162,7 @@
             <a:endParaRPr lang="en-US" sz="1300" dirty="0"/>
           </a:p>
           <a:p>
-            <a:pPr indent="0" marL="0">
+            <a:pPr marL="0" indent="0">
               <a:buNone/>
             </a:pPr>
             <a:r>
@@ -13908,13 +14179,13 @@
             <a:endParaRPr lang="en-US" sz="1300" dirty="0"/>
           </a:p>
           <a:p>
-            <a:pPr indent="0" marL="0">
+            <a:pPr marL="0" indent="0">
               <a:buNone/>
             </a:pPr>
             <a:endParaRPr lang="en-US" sz="1300" dirty="0"/>
           </a:p>
           <a:p>
-            <a:pPr indent="0" marL="0">
+            <a:pPr marL="0" indent="0">
               <a:buNone/>
             </a:pPr>
             <a:r>
@@ -13931,7 +14202,7 @@
             <a:endParaRPr lang="en-US" sz="1300" dirty="0"/>
           </a:p>
           <a:p>
-            <a:pPr indent="0" marL="0">
+            <a:pPr marL="0" indent="0">
               <a:buNone/>
             </a:pPr>
             <a:r>
@@ -14250,4 +14521,319 @@
     </a:ext>
   </a:extLst>
 </a:theme>
+</file>
+
+<file path=ppt/theme/theme2.xml><?xml version="1.0" encoding="utf-8"?>
+<a:theme xmlns:a="http://schemas.openxmlformats.org/drawingml/2006/main" name="Tema de Office">
+  <a:themeElements>
+    <a:clrScheme name="Office">
+      <a:dk1>
+        <a:sysClr val="windowText" lastClr="000000"/>
+      </a:dk1>
+      <a:lt1>
+        <a:sysClr val="window" lastClr="FFFFFF"/>
+      </a:lt1>
+      <a:dk2>
+        <a:srgbClr val="0E2841"/>
+      </a:dk2>
+      <a:lt2>
+        <a:srgbClr val="E8E8E8"/>
+      </a:lt2>
+      <a:accent1>
+        <a:srgbClr val="156082"/>
+      </a:accent1>
+      <a:accent2>
+        <a:srgbClr val="E97132"/>
+      </a:accent2>
+      <a:accent3>
+        <a:srgbClr val="196B24"/>
+      </a:accent3>
+      <a:accent4>
+        <a:srgbClr val="0F9ED5"/>
+      </a:accent4>
+      <a:accent5>
+        <a:srgbClr val="A02B93"/>
+      </a:accent5>
+      <a:accent6>
+        <a:srgbClr val="4EA72E"/>
+      </a:accent6>
+      <a:hlink>
+        <a:srgbClr val="467886"/>
+      </a:hlink>
+      <a:folHlink>
+        <a:srgbClr val="96607D"/>
+      </a:folHlink>
+    </a:clrScheme>
+    <a:fontScheme name="Office">
+      <a:majorFont>
+        <a:latin typeface="Aptos Display" panose="02110004020202020204"/>
+        <a:ea typeface=""/>
+        <a:cs typeface=""/>
+        <a:font script="Jpan" typeface="游ゴシック Light"/>
+        <a:font script="Hang" typeface="맑은 고딕"/>
+        <a:font script="Hans" typeface="等线 Light"/>
+        <a:font script="Hant" typeface="新細明體"/>
+        <a:font script="Arab" typeface="Times New Roman"/>
+        <a:font script="Hebr" typeface="Times New Roman"/>
+        <a:font script="Thai" typeface="Angsana New"/>
+        <a:font script="Ethi" typeface="Nyala"/>
+        <a:font script="Beng" typeface="Vrinda"/>
+        <a:font script="Gujr" typeface="Shruti"/>
+        <a:font script="Khmr" typeface="MoolBoran"/>
+        <a:font script="Knda" typeface="Tunga"/>
+        <a:font script="Guru" typeface="Raavi"/>
+        <a:font script="Cans" typeface="Euphemia"/>
+        <a:font script="Cher" typeface="Plantagenet Cherokee"/>
+        <a:font script="Yiii" typeface="Microsoft Yi Baiti"/>
+        <a:font script="Tibt" typeface="Microsoft Himalaya"/>
+        <a:font script="Thaa" typeface="MV Boli"/>
+        <a:font script="Deva" typeface="Mangal"/>
+        <a:font script="Telu" typeface="Gautami"/>
+        <a:font script="Taml" typeface="Latha"/>
+        <a:font script="Syrc" typeface="Estrangelo Edessa"/>
+        <a:font script="Orya" typeface="Kalinga"/>
+        <a:font script="Mlym" typeface="Kartika"/>
+        <a:font script="Laoo" typeface="DokChampa"/>
+        <a:font script="Sinh" typeface="Iskoola Pota"/>
+        <a:font script="Mong" typeface="Mongolian Baiti"/>
+        <a:font script="Viet" typeface="Times New Roman"/>
+        <a:font script="Uigh" typeface="Microsoft Uighur"/>
+        <a:font script="Geor" typeface="Sylfaen"/>
+        <a:font script="Armn" typeface="Arial"/>
+        <a:font script="Bugi" typeface="Leelawadee UI"/>
+        <a:font script="Bopo" typeface="Microsoft JhengHei"/>
+        <a:font script="Java" typeface="Javanese Text"/>
+        <a:font script="Lisu" typeface="Segoe UI"/>
+        <a:font script="Mymr" typeface="Myanmar Text"/>
+        <a:font script="Nkoo" typeface="Ebrima"/>
+        <a:font script="Olck" typeface="Nirmala UI"/>
+        <a:font script="Osma" typeface="Ebrima"/>
+        <a:font script="Phag" typeface="Phagspa"/>
+        <a:font script="Syrn" typeface="Estrangelo Edessa"/>
+        <a:font script="Syrj" typeface="Estrangelo Edessa"/>
+        <a:font script="Syre" typeface="Estrangelo Edessa"/>
+        <a:font script="Sora" typeface="Nirmala UI"/>
+        <a:font script="Tale" typeface="Microsoft Tai Le"/>
+        <a:font script="Talu" typeface="Microsoft New Tai Lue"/>
+        <a:font script="Tfng" typeface="Ebrima"/>
+      </a:majorFont>
+      <a:minorFont>
+        <a:latin typeface="Aptos" panose="02110004020202020204"/>
+        <a:ea typeface=""/>
+        <a:cs typeface=""/>
+        <a:font script="Jpan" typeface="游ゴシック"/>
+        <a:font script="Hang" typeface="맑은 고딕"/>
+        <a:font script="Hans" typeface="等线"/>
+        <a:font script="Hant" typeface="新細明體"/>
+        <a:font script="Arab" typeface="Arial"/>
+        <a:font script="Hebr" typeface="Arial"/>
+        <a:font script="Thai" typeface="Cordia New"/>
+        <a:font script="Ethi" typeface="Nyala"/>
+        <a:font script="Beng" typeface="Vrinda"/>
+        <a:font script="Gujr" typeface="Shruti"/>
+        <a:font script="Khmr" typeface="DaunPenh"/>
+        <a:font script="Knda" typeface="Tunga"/>
+        <a:font script="Guru" typeface="Raavi"/>
+        <a:font script="Cans" typeface="Euphemia"/>
+        <a:font script="Cher" typeface="Plantagenet Cherokee"/>
+        <a:font script="Yiii" typeface="Microsoft Yi Baiti"/>
+        <a:font script="Tibt" typeface="Microsoft Himalaya"/>
+        <a:font script="Thaa" typeface="MV Boli"/>
+        <a:font script="Deva" typeface="Mangal"/>
+        <a:font script="Telu" typeface="Gautami"/>
+        <a:font script="Taml" typeface="Latha"/>
+        <a:font script="Syrc" typeface="Estrangelo Edessa"/>
+        <a:font script="Orya" typeface="Kalinga"/>
+        <a:font script="Mlym" typeface="Kartika"/>
+        <a:font script="Laoo" typeface="DokChampa"/>
+        <a:font script="Sinh" typeface="Iskoola Pota"/>
+        <a:font script="Mong" typeface="Mongolian Baiti"/>
+        <a:font script="Viet" typeface="Arial"/>
+        <a:font script="Uigh" typeface="Microsoft Uighur"/>
+        <a:font script="Geor" typeface="Sylfaen"/>
+        <a:font script="Armn" typeface="Arial"/>
+        <a:font script="Bugi" typeface="Leelawadee UI"/>
+        <a:font script="Bopo" typeface="Microsoft JhengHei"/>
+        <a:font script="Java" typeface="Javanese Text"/>
+        <a:font script="Lisu" typeface="Segoe UI"/>
+        <a:font script="Mymr" typeface="Myanmar Text"/>
+        <a:font script="Nkoo" typeface="Ebrima"/>
+        <a:font script="Olck" typeface="Nirmala UI"/>
+        <a:font script="Osma" typeface="Ebrima"/>
+        <a:font script="Phag" typeface="Phagspa"/>
+        <a:font script="Syrn" typeface="Estrangelo Edessa"/>
+        <a:font script="Syrj" typeface="Estrangelo Edessa"/>
+        <a:font script="Syre" typeface="Estrangelo Edessa"/>
+        <a:font script="Sora" typeface="Nirmala UI"/>
+        <a:font script="Tale" typeface="Microsoft Tai Le"/>
+        <a:font script="Talu" typeface="Microsoft New Tai Lue"/>
+        <a:font script="Tfng" typeface="Ebrima"/>
+      </a:minorFont>
+    </a:fontScheme>
+    <a:fmtScheme name="Office">
+      <a:fillStyleLst>
+        <a:solidFill>
+          <a:schemeClr val="phClr"/>
+        </a:solidFill>
+        <a:gradFill rotWithShape="1">
+          <a:gsLst>
+            <a:gs pos="0">
+              <a:schemeClr val="phClr">
+                <a:lumMod val="110000"/>
+                <a:satMod val="105000"/>
+                <a:tint val="67000"/>
+              </a:schemeClr>
+            </a:gs>
+            <a:gs pos="50000">
+              <a:schemeClr val="phClr">
+                <a:lumMod val="105000"/>
+                <a:satMod val="103000"/>
+                <a:tint val="73000"/>
+              </a:schemeClr>
+            </a:gs>
+            <a:gs pos="100000">
+              <a:schemeClr val="phClr">
+                <a:lumMod val="105000"/>
+                <a:satMod val="109000"/>
+                <a:tint val="81000"/>
+              </a:schemeClr>
+            </a:gs>
+          </a:gsLst>
+          <a:lin ang="5400000" scaled="0"/>
+        </a:gradFill>
+        <a:gradFill rotWithShape="1">
+          <a:gsLst>
+            <a:gs pos="0">
+              <a:schemeClr val="phClr">
+                <a:satMod val="103000"/>
+                <a:lumMod val="102000"/>
+                <a:tint val="94000"/>
+              </a:schemeClr>
+            </a:gs>
+            <a:gs pos="50000">
+              <a:schemeClr val="phClr">
+                <a:satMod val="110000"/>
+                <a:lumMod val="100000"/>
+                <a:shade val="100000"/>
+              </a:schemeClr>
+            </a:gs>
+            <a:gs pos="100000">
+              <a:schemeClr val="phClr">
+                <a:lumMod val="99000"/>
+                <a:satMod val="120000"/>
+                <a:shade val="78000"/>
+              </a:schemeClr>
+            </a:gs>
+          </a:gsLst>
+          <a:lin ang="5400000" scaled="0"/>
+        </a:gradFill>
+      </a:fillStyleLst>
+      <a:lnStyleLst>
+        <a:ln w="12700" cap="flat" cmpd="sng" algn="ctr">
+          <a:solidFill>
+            <a:schemeClr val="phClr"/>
+          </a:solidFill>
+          <a:prstDash val="solid"/>
+          <a:miter lim="800000"/>
+        </a:ln>
+        <a:ln w="19050" cap="flat" cmpd="sng" algn="ctr">
+          <a:solidFill>
+            <a:schemeClr val="phClr"/>
+          </a:solidFill>
+          <a:prstDash val="solid"/>
+          <a:miter lim="800000"/>
+        </a:ln>
+        <a:ln w="25400" cap="flat" cmpd="sng" algn="ctr">
+          <a:solidFill>
+            <a:schemeClr val="phClr"/>
+          </a:solidFill>
+          <a:prstDash val="solid"/>
+          <a:miter lim="800000"/>
+        </a:ln>
+      </a:lnStyleLst>
+      <a:effectStyleLst>
+        <a:effectStyle>
+          <a:effectLst/>
+        </a:effectStyle>
+        <a:effectStyle>
+          <a:effectLst/>
+        </a:effectStyle>
+        <a:effectStyle>
+          <a:effectLst>
+            <a:outerShdw blurRad="57150" dist="19050" dir="5400000" algn="ctr" rotWithShape="0">
+              <a:srgbClr val="000000">
+                <a:alpha val="63000"/>
+              </a:srgbClr>
+            </a:outerShdw>
+          </a:effectLst>
+        </a:effectStyle>
+      </a:effectStyleLst>
+      <a:bgFillStyleLst>
+        <a:solidFill>
+          <a:schemeClr val="phClr"/>
+        </a:solidFill>
+        <a:solidFill>
+          <a:schemeClr val="phClr">
+            <a:tint val="95000"/>
+            <a:satMod val="170000"/>
+          </a:schemeClr>
+        </a:solidFill>
+        <a:gradFill rotWithShape="1">
+          <a:gsLst>
+            <a:gs pos="0">
+              <a:schemeClr val="phClr">
+                <a:tint val="93000"/>
+                <a:satMod val="150000"/>
+                <a:shade val="98000"/>
+                <a:lumMod val="102000"/>
+              </a:schemeClr>
+            </a:gs>
+            <a:gs pos="50000">
+              <a:schemeClr val="phClr">
+                <a:tint val="98000"/>
+                <a:satMod val="130000"/>
+                <a:shade val="90000"/>
+                <a:lumMod val="103000"/>
+              </a:schemeClr>
+            </a:gs>
+            <a:gs pos="100000">
+              <a:schemeClr val="phClr">
+                <a:shade val="63000"/>
+                <a:satMod val="120000"/>
+              </a:schemeClr>
+            </a:gs>
+          </a:gsLst>
+          <a:lin ang="5400000" scaled="0"/>
+        </a:gradFill>
+      </a:bgFillStyleLst>
+    </a:fmtScheme>
+  </a:themeElements>
+  <a:objectDefaults>
+    <a:lnDef>
+      <a:spPr/>
+      <a:bodyPr/>
+      <a:lstStyle/>
+      <a:style>
+        <a:lnRef idx="2">
+          <a:schemeClr val="accent1"/>
+        </a:lnRef>
+        <a:fillRef idx="0">
+          <a:schemeClr val="accent1"/>
+        </a:fillRef>
+        <a:effectRef idx="1">
+          <a:schemeClr val="accent1"/>
+        </a:effectRef>
+        <a:fontRef idx="minor">
+          <a:schemeClr val="tx1"/>
+        </a:fontRef>
+      </a:style>
+    </a:lnDef>
+  </a:objectDefaults>
+  <a:extraClrSchemeLst/>
+  <a:extLst>
+    <a:ext uri="{05A4C25C-085E-4340-85A3-A5531E510DB2}">
+      <thm15:themeFamily xmlns:thm15="http://schemas.microsoft.com/office/thememl/2012/main" name="Office Theme" id="{2E142A2C-CD16-42D6-873A-C26D2A0506FA}" vid="{1BDDFF52-6CD6-40A5-AB3C-68EB2F1E4D0A}"/>
+    </a:ext>
+  </a:extLst>
+</a:theme>
 </file>